--- a/Anthropic云策略.pptx
+++ b/Anthropic云策略.pptx
@@ -6,6 +6,9 @@
   </p:sldMasterIdLst>
   <p:sldIdLst>
     <p:sldId id="256" r:id="rId7"/>
+    <p:sldId id="257" r:id="rId8"/>
+    <p:sldId id="258" r:id="rId9"/>
+    <p:sldId id="259" r:id="rId10"/>
   </p:sldIdLst>
   <p:sldSz cx="12191695" cy="6858000" type="screen4x3"/>
   <p:notesSz cx="6858000" cy="9144000"/>
@@ -4569,6 +4572,5562 @@
                 <a:ea typeface="PingFang SC"/>
               </a:rPr>
               <a:t>资料来源：Anthropic / Amazon / Google / Microsoft 官方公告及 CNBC、Datacenter Dynamics 报道（2025.10–2026.04）</a:t>
+            </a:r>
+          </a:p>
+        </p:txBody>
+      </p:sp>
+    </p:spTree>
+  </p:cSld>
+  <p:clrMapOvr>
+    <a:masterClrMapping/>
+  </p:clrMapOvr>
+</p:sld>
+</file>
+
+<file path=ppt/slides/slide2.xml><?xml version="1.0" encoding="utf-8"?>
+<p:sld xmlns:a="http://schemas.openxmlformats.org/drawingml/2006/main" xmlns:p="http://schemas.openxmlformats.org/presentationml/2006/main" xmlns:r="http://schemas.openxmlformats.org/officeDocument/2006/relationships">
+  <p:cSld>
+    <p:spTree>
+      <p:nvGrpSpPr>
+        <p:cNvPr id="1" name=""/>
+        <p:cNvGrpSpPr/>
+        <p:nvPr/>
+      </p:nvGrpSpPr>
+      <p:grpSpPr/>
+      <p:sp>
+        <p:nvSpPr>
+          <p:cNvPr id="2" name="Rectangle 1"/>
+          <p:cNvSpPr/>
+          <p:nvPr/>
+        </p:nvSpPr>
+        <p:spPr>
+          <a:xfrm>
+            <a:off x="0" y="0"/>
+            <a:ext cx="12191695" cy="6858000"/>
+          </a:xfrm>
+          <a:prstGeom prst="rect">
+            <a:avLst/>
+          </a:prstGeom>
+          <a:solidFill>
+            <a:srgbClr val="F7F4EF"/>
+          </a:solidFill>
+          <a:ln>
+            <a:noFill/>
+          </a:ln>
+          <a:effectLst/>
+        </p:spPr>
+        <p:style>
+          <a:lnRef idx="1">
+            <a:schemeClr val="accent1"/>
+          </a:lnRef>
+          <a:fillRef idx="3">
+            <a:schemeClr val="accent1"/>
+          </a:fillRef>
+          <a:effectRef idx="2">
+            <a:schemeClr val="accent1"/>
+          </a:effectRef>
+          <a:fontRef idx="minor">
+            <a:schemeClr val="lt1"/>
+          </a:fontRef>
+        </p:style>
+        <p:txBody>
+          <a:bodyPr rtlCol="0" anchor="ctr"/>
+          <a:lstStyle/>
+          <a:p>
+            <a:pPr algn="ctr"/>
+          </a:p>
+        </p:txBody>
+      </p:sp>
+      <p:sp>
+        <p:nvSpPr>
+          <p:cNvPr id="3" name="Rectangle 2"/>
+          <p:cNvSpPr/>
+          <p:nvPr/>
+        </p:nvSpPr>
+        <p:spPr>
+          <a:xfrm>
+            <a:off x="0" y="0"/>
+            <a:ext cx="12191695" cy="164592"/>
+          </a:xfrm>
+          <a:prstGeom prst="rect">
+            <a:avLst/>
+          </a:prstGeom>
+          <a:solidFill>
+            <a:srgbClr val="D97757"/>
+          </a:solidFill>
+          <a:ln>
+            <a:noFill/>
+          </a:ln>
+          <a:effectLst/>
+        </p:spPr>
+        <p:style>
+          <a:lnRef idx="1">
+            <a:schemeClr val="accent1"/>
+          </a:lnRef>
+          <a:fillRef idx="3">
+            <a:schemeClr val="accent1"/>
+          </a:fillRef>
+          <a:effectRef idx="2">
+            <a:schemeClr val="accent1"/>
+          </a:effectRef>
+          <a:fontRef idx="minor">
+            <a:schemeClr val="lt1"/>
+          </a:fontRef>
+        </p:style>
+        <p:txBody>
+          <a:bodyPr rtlCol="0" anchor="ctr"/>
+          <a:lstStyle/>
+          <a:p>
+            <a:pPr algn="ctr"/>
+          </a:p>
+        </p:txBody>
+      </p:sp>
+      <p:sp>
+        <p:nvSpPr>
+          <p:cNvPr id="4" name="TextBox 3"/>
+          <p:cNvSpPr txBox="1"/>
+          <p:nvPr/>
+        </p:nvSpPr>
+        <p:spPr>
+          <a:xfrm>
+            <a:off x="502920" y="292608"/>
+            <a:ext cx="8778240" cy="868680"/>
+          </a:xfrm>
+          <a:prstGeom prst="rect">
+            <a:avLst/>
+          </a:prstGeom>
+          <a:noFill/>
+        </p:spPr>
+        <p:txBody>
+          <a:bodyPr wrap="square" anchor="t" lIns="25400" rIns="25400" tIns="25400" bIns="25400">
+            <a:spAutoFit/>
+          </a:bodyPr>
+          <a:lstStyle/>
+          <a:p>
+            <a:pPr algn="l">
+              <a:spcBef>
+                <a:spcPts val="0"/>
+              </a:spcBef>
+              <a:spcAft>
+                <a:spcPts val="400"/>
+              </a:spcAft>
+            </a:pPr>
+            <a:r>
+              <a:rPr sz="3000" b="1">
+                <a:solidFill>
+                  <a:srgbClr val="1A1A1A"/>
+                </a:solidFill>
+                <a:latin typeface="PingFang SC"/>
+                <a:ea typeface="PingFang SC"/>
+              </a:rPr>
+              <a:t>Anthropic × Databricks</a:t>
+            </a:r>
+          </a:p>
+          <a:p>
+            <a:pPr algn="l">
+              <a:spcBef>
+                <a:spcPts val="0"/>
+              </a:spcBef>
+              <a:spcAft>
+                <a:spcPts val="400"/>
+              </a:spcAft>
+            </a:pPr>
+            <a:r>
+              <a:rPr sz="1400" b="0">
+                <a:solidFill>
+                  <a:srgbClr val="5F5F5F"/>
+                </a:solidFill>
+                <a:latin typeface="PingFang SC"/>
+                <a:ea typeface="PingFang SC"/>
+              </a:rPr>
+              <a:t>五年期里程碑协议 —— 让 Claude 在企业「治理数据」上直接跑 Agent</a:t>
+            </a:r>
+          </a:p>
+        </p:txBody>
+      </p:sp>
+      <p:sp>
+        <p:nvSpPr>
+          <p:cNvPr id="5" name="Rectangle 4"/>
+          <p:cNvSpPr/>
+          <p:nvPr/>
+        </p:nvSpPr>
+        <p:spPr>
+          <a:xfrm>
+            <a:off x="9601200" y="384048"/>
+            <a:ext cx="2103120" cy="502920"/>
+          </a:xfrm>
+          <a:prstGeom prst="rect">
+            <a:avLst/>
+          </a:prstGeom>
+          <a:solidFill>
+            <a:srgbClr val="E8402A"/>
+          </a:solidFill>
+          <a:ln>
+            <a:noFill/>
+          </a:ln>
+          <a:effectLst/>
+        </p:spPr>
+        <p:style>
+          <a:lnRef idx="1">
+            <a:schemeClr val="accent1"/>
+          </a:lnRef>
+          <a:fillRef idx="3">
+            <a:schemeClr val="accent1"/>
+          </a:fillRef>
+          <a:effectRef idx="2">
+            <a:schemeClr val="accent1"/>
+          </a:effectRef>
+          <a:fontRef idx="minor">
+            <a:schemeClr val="lt1"/>
+          </a:fontRef>
+        </p:style>
+        <p:txBody>
+          <a:bodyPr rtlCol="0" anchor="ctr"/>
+          <a:lstStyle/>
+          <a:p>
+            <a:pPr algn="ctr"/>
+            <a:r>
+              <a:rPr sz="1400" b="1">
+                <a:solidFill>
+                  <a:srgbClr val="FFFFFF"/>
+                </a:solidFill>
+                <a:latin typeface="PingFang SC"/>
+                <a:ea typeface="PingFang SC"/>
+              </a:rPr>
+              <a:t>5 年 · 约 $100M</a:t>
+            </a:r>
+          </a:p>
+        </p:txBody>
+      </p:sp>
+      <p:sp>
+        <p:nvSpPr>
+          <p:cNvPr id="6" name="Rectangle 5"/>
+          <p:cNvSpPr/>
+          <p:nvPr/>
+        </p:nvSpPr>
+        <p:spPr>
+          <a:xfrm>
+            <a:off x="502920" y="1325880"/>
+            <a:ext cx="3154680" cy="4023360"/>
+          </a:xfrm>
+          <a:prstGeom prst="rect">
+            <a:avLst/>
+          </a:prstGeom>
+          <a:solidFill>
+            <a:srgbClr val="2B2B2B"/>
+          </a:solidFill>
+          <a:ln>
+            <a:noFill/>
+          </a:ln>
+          <a:effectLst/>
+        </p:spPr>
+        <p:style>
+          <a:lnRef idx="1">
+            <a:schemeClr val="accent1"/>
+          </a:lnRef>
+          <a:fillRef idx="3">
+            <a:schemeClr val="accent1"/>
+          </a:fillRef>
+          <a:effectRef idx="2">
+            <a:schemeClr val="accent1"/>
+          </a:effectRef>
+          <a:fontRef idx="minor">
+            <a:schemeClr val="lt1"/>
+          </a:fontRef>
+        </p:style>
+        <p:txBody>
+          <a:bodyPr rtlCol="0" anchor="ctr"/>
+          <a:lstStyle/>
+          <a:p>
+            <a:pPr algn="ctr"/>
+          </a:p>
+        </p:txBody>
+      </p:sp>
+      <p:sp>
+        <p:nvSpPr>
+          <p:cNvPr id="7" name="Rectangle 6"/>
+          <p:cNvSpPr/>
+          <p:nvPr/>
+        </p:nvSpPr>
+        <p:spPr>
+          <a:xfrm>
+            <a:off x="502920" y="1325880"/>
+            <a:ext cx="3154680" cy="566928"/>
+          </a:xfrm>
+          <a:prstGeom prst="rect">
+            <a:avLst/>
+          </a:prstGeom>
+          <a:solidFill>
+            <a:srgbClr val="E8402A"/>
+          </a:solidFill>
+          <a:ln>
+            <a:noFill/>
+          </a:ln>
+          <a:effectLst/>
+        </p:spPr>
+        <p:style>
+          <a:lnRef idx="1">
+            <a:schemeClr val="accent1"/>
+          </a:lnRef>
+          <a:fillRef idx="3">
+            <a:schemeClr val="accent1"/>
+          </a:fillRef>
+          <a:effectRef idx="2">
+            <a:schemeClr val="accent1"/>
+          </a:effectRef>
+          <a:fontRef idx="minor">
+            <a:schemeClr val="lt1"/>
+          </a:fontRef>
+        </p:style>
+        <p:txBody>
+          <a:bodyPr rtlCol="0" anchor="ctr"/>
+          <a:lstStyle/>
+          <a:p>
+            <a:pPr algn="ctr"/>
+          </a:p>
+        </p:txBody>
+      </p:sp>
+      <p:sp>
+        <p:nvSpPr>
+          <p:cNvPr id="8" name="TextBox 7"/>
+          <p:cNvSpPr txBox="1"/>
+          <p:nvPr/>
+        </p:nvSpPr>
+        <p:spPr>
+          <a:xfrm>
+            <a:off x="704088" y="1417320"/>
+            <a:ext cx="2788920" cy="457200"/>
+          </a:xfrm>
+          <a:prstGeom prst="rect">
+            <a:avLst/>
+          </a:prstGeom>
+          <a:noFill/>
+        </p:spPr>
+        <p:txBody>
+          <a:bodyPr wrap="square" anchor="ctr" lIns="25400" rIns="25400" tIns="25400" bIns="25400">
+            <a:spAutoFit/>
+          </a:bodyPr>
+          <a:lstStyle/>
+          <a:p>
+            <a:pPr algn="l">
+              <a:spcBef>
+                <a:spcPts val="0"/>
+              </a:spcBef>
+              <a:spcAft>
+                <a:spcPts val="200"/>
+              </a:spcAft>
+            </a:pPr>
+            <a:r>
+              <a:rPr sz="1300" b="1">
+                <a:solidFill>
+                  <a:srgbClr val="FFFFFF"/>
+                </a:solidFill>
+                <a:latin typeface="PingFang SC"/>
+                <a:ea typeface="PingFang SC"/>
+              </a:rPr>
+              <a:t>合作快照 · Databricks</a:t>
+            </a:r>
+          </a:p>
+        </p:txBody>
+      </p:sp>
+      <p:sp>
+        <p:nvSpPr>
+          <p:cNvPr id="9" name="TextBox 8"/>
+          <p:cNvSpPr txBox="1"/>
+          <p:nvPr/>
+        </p:nvSpPr>
+        <p:spPr>
+          <a:xfrm>
+            <a:off x="722376" y="2075688"/>
+            <a:ext cx="2734056" cy="566928"/>
+          </a:xfrm>
+          <a:prstGeom prst="rect">
+            <a:avLst/>
+          </a:prstGeom>
+          <a:noFill/>
+        </p:spPr>
+        <p:txBody>
+          <a:bodyPr wrap="square" anchor="t" lIns="25400" rIns="25400" tIns="25400" bIns="25400">
+            <a:spAutoFit/>
+          </a:bodyPr>
+          <a:lstStyle/>
+          <a:p>
+            <a:pPr algn="l">
+              <a:lnSpc>
+                <a:spcPct val="100000"/>
+              </a:lnSpc>
+              <a:spcBef>
+                <a:spcPts val="0"/>
+              </a:spcBef>
+              <a:spcAft>
+                <a:spcPts val="100"/>
+              </a:spcAft>
+            </a:pPr>
+            <a:r>
+              <a:rPr sz="1000" b="0">
+                <a:solidFill>
+                  <a:srgbClr val="B7B1A8"/>
+                </a:solidFill>
+                <a:latin typeface="PingFang SC"/>
+                <a:ea typeface="PingFang SC"/>
+              </a:rPr>
+              <a:t>协议类型</a:t>
+            </a:r>
+          </a:p>
+          <a:p>
+            <a:pPr algn="l">
+              <a:lnSpc>
+                <a:spcPct val="100000"/>
+              </a:lnSpc>
+              <a:spcBef>
+                <a:spcPts val="0"/>
+              </a:spcBef>
+              <a:spcAft>
+                <a:spcPts val="100"/>
+              </a:spcAft>
+            </a:pPr>
+            <a:r>
+              <a:rPr sz="1300" b="1">
+                <a:solidFill>
+                  <a:srgbClr val="FFFFFF"/>
+                </a:solidFill>
+                <a:latin typeface="PingFang SC"/>
+                <a:ea typeface="PingFang SC"/>
+              </a:rPr>
+              <a:t>战略合作（里程碑级）</a:t>
+            </a:r>
+          </a:p>
+        </p:txBody>
+      </p:sp>
+      <p:sp>
+        <p:nvSpPr>
+          <p:cNvPr id="10" name="TextBox 9"/>
+          <p:cNvSpPr txBox="1"/>
+          <p:nvPr/>
+        </p:nvSpPr>
+        <p:spPr>
+          <a:xfrm>
+            <a:off x="722376" y="2619756"/>
+            <a:ext cx="2734056" cy="566928"/>
+          </a:xfrm>
+          <a:prstGeom prst="rect">
+            <a:avLst/>
+          </a:prstGeom>
+          <a:noFill/>
+        </p:spPr>
+        <p:txBody>
+          <a:bodyPr wrap="square" anchor="t" lIns="25400" rIns="25400" tIns="25400" bIns="25400">
+            <a:spAutoFit/>
+          </a:bodyPr>
+          <a:lstStyle/>
+          <a:p>
+            <a:pPr algn="l">
+              <a:lnSpc>
+                <a:spcPct val="100000"/>
+              </a:lnSpc>
+              <a:spcBef>
+                <a:spcPts val="0"/>
+              </a:spcBef>
+              <a:spcAft>
+                <a:spcPts val="100"/>
+              </a:spcAft>
+            </a:pPr>
+            <a:r>
+              <a:rPr sz="1000" b="0">
+                <a:solidFill>
+                  <a:srgbClr val="B7B1A8"/>
+                </a:solidFill>
+                <a:latin typeface="PingFang SC"/>
+                <a:ea typeface="PingFang SC"/>
+              </a:rPr>
+              <a:t>公布时间</a:t>
+            </a:r>
+          </a:p>
+          <a:p>
+            <a:pPr algn="l">
+              <a:lnSpc>
+                <a:spcPct val="100000"/>
+              </a:lnSpc>
+              <a:spcBef>
+                <a:spcPts val="0"/>
+              </a:spcBef>
+              <a:spcAft>
+                <a:spcPts val="100"/>
+              </a:spcAft>
+            </a:pPr>
+            <a:r>
+              <a:rPr sz="1300" b="1">
+                <a:solidFill>
+                  <a:srgbClr val="FFFFFF"/>
+                </a:solidFill>
+                <a:latin typeface="PingFang SC"/>
+                <a:ea typeface="PingFang SC"/>
+              </a:rPr>
+              <a:t>2025.03.26</a:t>
+            </a:r>
+          </a:p>
+        </p:txBody>
+      </p:sp>
+      <p:sp>
+        <p:nvSpPr>
+          <p:cNvPr id="11" name="TextBox 10"/>
+          <p:cNvSpPr txBox="1"/>
+          <p:nvPr/>
+        </p:nvSpPr>
+        <p:spPr>
+          <a:xfrm>
+            <a:off x="722376" y="3163824"/>
+            <a:ext cx="2734056" cy="566928"/>
+          </a:xfrm>
+          <a:prstGeom prst="rect">
+            <a:avLst/>
+          </a:prstGeom>
+          <a:noFill/>
+        </p:spPr>
+        <p:txBody>
+          <a:bodyPr wrap="square" anchor="t" lIns="25400" rIns="25400" tIns="25400" bIns="25400">
+            <a:spAutoFit/>
+          </a:bodyPr>
+          <a:lstStyle/>
+          <a:p>
+            <a:pPr algn="l">
+              <a:lnSpc>
+                <a:spcPct val="100000"/>
+              </a:lnSpc>
+              <a:spcBef>
+                <a:spcPts val="0"/>
+              </a:spcBef>
+              <a:spcAft>
+                <a:spcPts val="100"/>
+              </a:spcAft>
+            </a:pPr>
+            <a:r>
+              <a:rPr sz="1000" b="0">
+                <a:solidFill>
+                  <a:srgbClr val="B7B1A8"/>
+                </a:solidFill>
+                <a:latin typeface="PingFang SC"/>
+                <a:ea typeface="PingFang SC"/>
+              </a:rPr>
+              <a:t>期限 / 金额</a:t>
+            </a:r>
+          </a:p>
+          <a:p>
+            <a:pPr algn="l">
+              <a:lnSpc>
+                <a:spcPct val="100000"/>
+              </a:lnSpc>
+              <a:spcBef>
+                <a:spcPts val="0"/>
+              </a:spcBef>
+              <a:spcAft>
+                <a:spcPts val="100"/>
+              </a:spcAft>
+            </a:pPr>
+            <a:r>
+              <a:rPr sz="1300" b="1">
+                <a:solidFill>
+                  <a:srgbClr val="FFFFFF"/>
+                </a:solidFill>
+                <a:latin typeface="PingFang SC"/>
+                <a:ea typeface="PingFang SC"/>
+              </a:rPr>
+              <a:t>5 年 · 约 $100M</a:t>
+            </a:r>
+          </a:p>
+        </p:txBody>
+      </p:sp>
+      <p:sp>
+        <p:nvSpPr>
+          <p:cNvPr id="12" name="TextBox 11"/>
+          <p:cNvSpPr txBox="1"/>
+          <p:nvPr/>
+        </p:nvSpPr>
+        <p:spPr>
+          <a:xfrm>
+            <a:off x="722376" y="3707892"/>
+            <a:ext cx="2734056" cy="566928"/>
+          </a:xfrm>
+          <a:prstGeom prst="rect">
+            <a:avLst/>
+          </a:prstGeom>
+          <a:noFill/>
+        </p:spPr>
+        <p:txBody>
+          <a:bodyPr wrap="square" anchor="t" lIns="25400" rIns="25400" tIns="25400" bIns="25400">
+            <a:spAutoFit/>
+          </a:bodyPr>
+          <a:lstStyle/>
+          <a:p>
+            <a:pPr algn="l">
+              <a:lnSpc>
+                <a:spcPct val="100000"/>
+              </a:lnSpc>
+              <a:spcBef>
+                <a:spcPts val="0"/>
+              </a:spcBef>
+              <a:spcAft>
+                <a:spcPts val="100"/>
+              </a:spcAft>
+            </a:pPr>
+            <a:r>
+              <a:rPr sz="1000" b="0">
+                <a:solidFill>
+                  <a:srgbClr val="B7B1A8"/>
+                </a:solidFill>
+                <a:latin typeface="PingFang SC"/>
+                <a:ea typeface="PingFang SC"/>
+              </a:rPr>
+              <a:t>触达客户</a:t>
+            </a:r>
+          </a:p>
+          <a:p>
+            <a:pPr algn="l">
+              <a:lnSpc>
+                <a:spcPct val="100000"/>
+              </a:lnSpc>
+              <a:spcBef>
+                <a:spcPts val="0"/>
+              </a:spcBef>
+              <a:spcAft>
+                <a:spcPts val="100"/>
+              </a:spcAft>
+            </a:pPr>
+            <a:r>
+              <a:rPr sz="1300" b="1">
+                <a:solidFill>
+                  <a:srgbClr val="FFFFFF"/>
+                </a:solidFill>
+                <a:latin typeface="PingFang SC"/>
+                <a:ea typeface="PingFang SC"/>
+              </a:rPr>
+              <a:t>10,000+ 企业</a:t>
+            </a:r>
+          </a:p>
+        </p:txBody>
+      </p:sp>
+      <p:sp>
+        <p:nvSpPr>
+          <p:cNvPr id="13" name="TextBox 12"/>
+          <p:cNvSpPr txBox="1"/>
+          <p:nvPr/>
+        </p:nvSpPr>
+        <p:spPr>
+          <a:xfrm>
+            <a:off x="722376" y="4251960"/>
+            <a:ext cx="2734056" cy="566928"/>
+          </a:xfrm>
+          <a:prstGeom prst="rect">
+            <a:avLst/>
+          </a:prstGeom>
+          <a:noFill/>
+        </p:spPr>
+        <p:txBody>
+          <a:bodyPr wrap="square" anchor="t" lIns="25400" rIns="25400" tIns="25400" bIns="25400">
+            <a:spAutoFit/>
+          </a:bodyPr>
+          <a:lstStyle/>
+          <a:p>
+            <a:pPr algn="l">
+              <a:lnSpc>
+                <a:spcPct val="100000"/>
+              </a:lnSpc>
+              <a:spcBef>
+                <a:spcPts val="0"/>
+              </a:spcBef>
+              <a:spcAft>
+                <a:spcPts val="100"/>
+              </a:spcAft>
+            </a:pPr>
+            <a:r>
+              <a:rPr sz="1000" b="0">
+                <a:solidFill>
+                  <a:srgbClr val="B7B1A8"/>
+                </a:solidFill>
+                <a:latin typeface="PingFang SC"/>
+                <a:ea typeface="PingFang SC"/>
+              </a:rPr>
+              <a:t>覆盖云</a:t>
+            </a:r>
+          </a:p>
+          <a:p>
+            <a:pPr algn="l">
+              <a:lnSpc>
+                <a:spcPct val="100000"/>
+              </a:lnSpc>
+              <a:spcBef>
+                <a:spcPts val="0"/>
+              </a:spcBef>
+              <a:spcAft>
+                <a:spcPts val="100"/>
+              </a:spcAft>
+            </a:pPr>
+            <a:r>
+              <a:rPr sz="1300" b="1">
+                <a:solidFill>
+                  <a:srgbClr val="FFFFFF"/>
+                </a:solidFill>
+                <a:latin typeface="PingFang SC"/>
+                <a:ea typeface="PingFang SC"/>
+              </a:rPr>
+              <a:t>AWS / Azure / GCP</a:t>
+            </a:r>
+          </a:p>
+        </p:txBody>
+      </p:sp>
+      <p:sp>
+        <p:nvSpPr>
+          <p:cNvPr id="14" name="TextBox 13"/>
+          <p:cNvSpPr txBox="1"/>
+          <p:nvPr/>
+        </p:nvSpPr>
+        <p:spPr>
+          <a:xfrm>
+            <a:off x="722376" y="4796028"/>
+            <a:ext cx="2734056" cy="566928"/>
+          </a:xfrm>
+          <a:prstGeom prst="rect">
+            <a:avLst/>
+          </a:prstGeom>
+          <a:noFill/>
+        </p:spPr>
+        <p:txBody>
+          <a:bodyPr wrap="square" anchor="t" lIns="25400" rIns="25400" tIns="25400" bIns="25400">
+            <a:spAutoFit/>
+          </a:bodyPr>
+          <a:lstStyle/>
+          <a:p>
+            <a:pPr algn="l">
+              <a:lnSpc>
+                <a:spcPct val="100000"/>
+              </a:lnSpc>
+              <a:spcBef>
+                <a:spcPts val="0"/>
+              </a:spcBef>
+              <a:spcAft>
+                <a:spcPts val="100"/>
+              </a:spcAft>
+            </a:pPr>
+            <a:r>
+              <a:rPr sz="1000" b="0">
+                <a:solidFill>
+                  <a:srgbClr val="B7B1A8"/>
+                </a:solidFill>
+                <a:latin typeface="PingFang SC"/>
+                <a:ea typeface="PingFang SC"/>
+              </a:rPr>
+              <a:t>荣誉</a:t>
+            </a:r>
+          </a:p>
+          <a:p>
+            <a:pPr algn="l">
+              <a:lnSpc>
+                <a:spcPct val="100000"/>
+              </a:lnSpc>
+              <a:spcBef>
+                <a:spcPts val="0"/>
+              </a:spcBef>
+              <a:spcAft>
+                <a:spcPts val="100"/>
+              </a:spcAft>
+            </a:pPr>
+            <a:r>
+              <a:rPr sz="1300" b="1">
+                <a:solidFill>
+                  <a:srgbClr val="FFFFFF"/>
+                </a:solidFill>
+                <a:latin typeface="PingFang SC"/>
+                <a:ea typeface="PingFang SC"/>
+              </a:rPr>
+              <a:t>2026 ISV「AI 转型年度伙伴」</a:t>
+            </a:r>
+          </a:p>
+        </p:txBody>
+      </p:sp>
+      <p:sp>
+        <p:nvSpPr>
+          <p:cNvPr id="15" name="Rectangle 14"/>
+          <p:cNvSpPr/>
+          <p:nvPr/>
+        </p:nvSpPr>
+        <p:spPr>
+          <a:xfrm>
+            <a:off x="3840480" y="1325880"/>
+            <a:ext cx="7845552" cy="1874519"/>
+          </a:xfrm>
+          <a:prstGeom prst="rect">
+            <a:avLst/>
+          </a:prstGeom>
+          <a:solidFill>
+            <a:srgbClr val="FFFFFF"/>
+          </a:solidFill>
+          <a:ln w="12700">
+            <a:solidFill>
+              <a:srgbClr val="E3DDD3"/>
+            </a:solidFill>
+          </a:ln>
+          <a:effectLst/>
+        </p:spPr>
+        <p:style>
+          <a:lnRef idx="1">
+            <a:schemeClr val="accent1"/>
+          </a:lnRef>
+          <a:fillRef idx="3">
+            <a:schemeClr val="accent1"/>
+          </a:fillRef>
+          <a:effectRef idx="2">
+            <a:schemeClr val="accent1"/>
+          </a:effectRef>
+          <a:fontRef idx="minor">
+            <a:schemeClr val="lt1"/>
+          </a:fontRef>
+        </p:style>
+        <p:txBody>
+          <a:bodyPr rtlCol="0" anchor="ctr"/>
+          <a:lstStyle/>
+          <a:p>
+            <a:pPr algn="ctr"/>
+          </a:p>
+        </p:txBody>
+      </p:sp>
+      <p:sp>
+        <p:nvSpPr>
+          <p:cNvPr id="16" name="Rectangle 15"/>
+          <p:cNvSpPr/>
+          <p:nvPr/>
+        </p:nvSpPr>
+        <p:spPr>
+          <a:xfrm>
+            <a:off x="3840480" y="1325880"/>
+            <a:ext cx="91440" cy="1874519"/>
+          </a:xfrm>
+          <a:prstGeom prst="rect">
+            <a:avLst/>
+          </a:prstGeom>
+          <a:solidFill>
+            <a:srgbClr val="E8402A"/>
+          </a:solidFill>
+          <a:ln>
+            <a:noFill/>
+          </a:ln>
+          <a:effectLst/>
+        </p:spPr>
+        <p:style>
+          <a:lnRef idx="1">
+            <a:schemeClr val="accent1"/>
+          </a:lnRef>
+          <a:fillRef idx="3">
+            <a:schemeClr val="accent1"/>
+          </a:fillRef>
+          <a:effectRef idx="2">
+            <a:schemeClr val="accent1"/>
+          </a:effectRef>
+          <a:fontRef idx="minor">
+            <a:schemeClr val="lt1"/>
+          </a:fontRef>
+        </p:style>
+        <p:txBody>
+          <a:bodyPr rtlCol="0" anchor="ctr"/>
+          <a:lstStyle/>
+          <a:p>
+            <a:pPr algn="ctr"/>
+          </a:p>
+        </p:txBody>
+      </p:sp>
+      <p:sp>
+        <p:nvSpPr>
+          <p:cNvPr id="17" name="TextBox 16"/>
+          <p:cNvSpPr txBox="1"/>
+          <p:nvPr/>
+        </p:nvSpPr>
+        <p:spPr>
+          <a:xfrm>
+            <a:off x="4078224" y="1435608"/>
+            <a:ext cx="7479792" cy="365760"/>
+          </a:xfrm>
+          <a:prstGeom prst="rect">
+            <a:avLst/>
+          </a:prstGeom>
+          <a:noFill/>
+        </p:spPr>
+        <p:txBody>
+          <a:bodyPr wrap="square" anchor="t" lIns="25400" rIns="25400" tIns="25400" bIns="25400">
+            <a:spAutoFit/>
+          </a:bodyPr>
+          <a:lstStyle/>
+          <a:p>
+            <a:pPr algn="l">
+              <a:spcBef>
+                <a:spcPts val="0"/>
+              </a:spcBef>
+              <a:spcAft>
+                <a:spcPts val="200"/>
+              </a:spcAft>
+            </a:pPr>
+            <a:r>
+              <a:rPr sz="1400" b="1">
+                <a:solidFill>
+                  <a:srgbClr val="E8402A"/>
+                </a:solidFill>
+                <a:latin typeface="PingFang SC"/>
+                <a:ea typeface="PingFang SC"/>
+              </a:rPr>
+              <a:t>① 合作内容与技术整合</a:t>
+            </a:r>
+          </a:p>
+        </p:txBody>
+      </p:sp>
+      <p:sp>
+        <p:nvSpPr>
+          <p:cNvPr id="18" name="TextBox 17"/>
+          <p:cNvSpPr txBox="1"/>
+          <p:nvPr/>
+        </p:nvSpPr>
+        <p:spPr>
+          <a:xfrm>
+            <a:off x="4096512" y="1783080"/>
+            <a:ext cx="7388352" cy="2743200"/>
+          </a:xfrm>
+          <a:prstGeom prst="rect">
+            <a:avLst/>
+          </a:prstGeom>
+          <a:noFill/>
+        </p:spPr>
+        <p:txBody>
+          <a:bodyPr wrap="square" anchor="t" lIns="25400" rIns="25400" tIns="25400" bIns="25400">
+            <a:spAutoFit/>
+          </a:bodyPr>
+          <a:lstStyle/>
+          <a:p>
+            <a:pPr algn="l">
+              <a:lnSpc>
+                <a:spcPct val="108000"/>
+              </a:lnSpc>
+              <a:spcBef>
+                <a:spcPts val="0"/>
+              </a:spcBef>
+              <a:spcAft>
+                <a:spcPts val="800"/>
+              </a:spcAft>
+            </a:pPr>
+            <a:r>
+              <a:rPr sz="1150" b="1">
+                <a:solidFill>
+                  <a:srgbClr val="E8402A"/>
+                </a:solidFill>
+                <a:latin typeface="PingFang SC"/>
+                <a:ea typeface="PingFang SC"/>
+              </a:rPr>
+              <a:t>▪ </a:t>
+            </a:r>
+            <a:r>
+              <a:rPr sz="1150" b="1">
+                <a:solidFill>
+                  <a:srgbClr val="1A1A1A"/>
+                </a:solidFill>
+                <a:latin typeface="PingFang SC"/>
+                <a:ea typeface="PingFang SC"/>
+              </a:rPr>
+              <a:t>Claude 原生上架 Data Intelligence Platform</a:t>
+            </a:r>
+          </a:p>
+          <a:p>
+            <a:pPr algn="l">
+              <a:lnSpc>
+                <a:spcPct val="108000"/>
+              </a:lnSpc>
+              <a:spcBef>
+                <a:spcPts val="0"/>
+              </a:spcBef>
+              <a:spcAft>
+                <a:spcPts val="800"/>
+              </a:spcAft>
+            </a:pPr>
+            <a:r>
+              <a:rPr sz="1150" b="1">
+                <a:solidFill>
+                  <a:srgbClr val="E8402A"/>
+                </a:solidFill>
+                <a:latin typeface="PingFang SC"/>
+                <a:ea typeface="PingFang SC"/>
+              </a:rPr>
+              <a:t>▪ </a:t>
+            </a:r>
+            <a:r>
+              <a:rPr sz="1150" b="0">
+                <a:solidFill>
+                  <a:srgbClr val="5F5F5F"/>
+                </a:solidFill>
+                <a:latin typeface="PingFang SC"/>
+                <a:ea typeface="PingFang SC"/>
+              </a:rPr>
+              <a:t>进入 Agent Bricks / AI Playground / Model Serving</a:t>
+            </a:r>
+          </a:p>
+          <a:p>
+            <a:pPr algn="l">
+              <a:lnSpc>
+                <a:spcPct val="108000"/>
+              </a:lnSpc>
+              <a:spcBef>
+                <a:spcPts val="0"/>
+              </a:spcBef>
+              <a:spcAft>
+                <a:spcPts val="800"/>
+              </a:spcAft>
+            </a:pPr>
+            <a:r>
+              <a:rPr sz="1150" b="1">
+                <a:solidFill>
+                  <a:srgbClr val="E8402A"/>
+                </a:solidFill>
+                <a:latin typeface="PingFang SC"/>
+                <a:ea typeface="PingFang SC"/>
+              </a:rPr>
+              <a:t>▪ </a:t>
+            </a:r>
+            <a:r>
+              <a:rPr sz="1150" b="1">
+                <a:solidFill>
+                  <a:srgbClr val="1A1A1A"/>
+                </a:solidFill>
+                <a:latin typeface="PingFang SC"/>
+                <a:ea typeface="PingFang SC"/>
+              </a:rPr>
+              <a:t>经 Unity Catalog &amp; Unity AI Gateway 统一治理调用</a:t>
+            </a:r>
+          </a:p>
+          <a:p>
+            <a:pPr algn="l">
+              <a:lnSpc>
+                <a:spcPct val="108000"/>
+              </a:lnSpc>
+              <a:spcBef>
+                <a:spcPts val="0"/>
+              </a:spcBef>
+              <a:spcAft>
+                <a:spcPts val="800"/>
+              </a:spcAft>
+            </a:pPr>
+            <a:r>
+              <a:rPr sz="1150" b="1">
+                <a:solidFill>
+                  <a:srgbClr val="E8402A"/>
+                </a:solidFill>
+                <a:latin typeface="PingFang SC"/>
+                <a:ea typeface="PingFang SC"/>
+              </a:rPr>
+              <a:t>▪ </a:t>
+            </a:r>
+            <a:r>
+              <a:rPr sz="1150" b="0">
+                <a:solidFill>
+                  <a:srgbClr val="5F5F5F"/>
+                </a:solidFill>
+                <a:latin typeface="PingFang SC"/>
+                <a:ea typeface="PingFang SC"/>
+              </a:rPr>
+              <a:t>Unity Catalog 的 SQL/Python 函数作为工具注入 Claude SDK</a:t>
+            </a:r>
+          </a:p>
+          <a:p>
+            <a:pPr algn="l">
+              <a:lnSpc>
+                <a:spcPct val="108000"/>
+              </a:lnSpc>
+              <a:spcBef>
+                <a:spcPts val="0"/>
+              </a:spcBef>
+              <a:spcAft>
+                <a:spcPts val="800"/>
+              </a:spcAft>
+            </a:pPr>
+            <a:r>
+              <a:rPr sz="1150" b="1">
+                <a:solidFill>
+                  <a:srgbClr val="E8402A"/>
+                </a:solidFill>
+                <a:latin typeface="PingFang SC"/>
+                <a:ea typeface="PingFang SC"/>
+              </a:rPr>
+              <a:t>▪ </a:t>
+            </a:r>
+            <a:r>
+              <a:rPr sz="1150" b="0">
+                <a:solidFill>
+                  <a:srgbClr val="5F5F5F"/>
+                </a:solidFill>
+                <a:latin typeface="PingFang SC"/>
+                <a:ea typeface="PingFang SC"/>
+              </a:rPr>
+              <a:t>前沿模型快速跟进上线（3.7 Sonnet → Fable 5）</a:t>
+            </a:r>
+          </a:p>
+        </p:txBody>
+      </p:sp>
+      <p:sp>
+        <p:nvSpPr>
+          <p:cNvPr id="19" name="Rectangle 18"/>
+          <p:cNvSpPr/>
+          <p:nvPr/>
+        </p:nvSpPr>
+        <p:spPr>
+          <a:xfrm>
+            <a:off x="3840480" y="3310128"/>
+            <a:ext cx="3840480" cy="2039112"/>
+          </a:xfrm>
+          <a:prstGeom prst="rect">
+            <a:avLst/>
+          </a:prstGeom>
+          <a:solidFill>
+            <a:srgbClr val="FFFFFF"/>
+          </a:solidFill>
+          <a:ln w="12700">
+            <a:solidFill>
+              <a:srgbClr val="E3DDD3"/>
+            </a:solidFill>
+          </a:ln>
+          <a:effectLst/>
+        </p:spPr>
+        <p:style>
+          <a:lnRef idx="1">
+            <a:schemeClr val="accent1"/>
+          </a:lnRef>
+          <a:fillRef idx="3">
+            <a:schemeClr val="accent1"/>
+          </a:fillRef>
+          <a:effectRef idx="2">
+            <a:schemeClr val="accent1"/>
+          </a:effectRef>
+          <a:fontRef idx="minor">
+            <a:schemeClr val="lt1"/>
+          </a:fontRef>
+        </p:style>
+        <p:txBody>
+          <a:bodyPr rtlCol="0" anchor="ctr"/>
+          <a:lstStyle/>
+          <a:p>
+            <a:pPr algn="ctr"/>
+          </a:p>
+        </p:txBody>
+      </p:sp>
+      <p:sp>
+        <p:nvSpPr>
+          <p:cNvPr id="20" name="Rectangle 19"/>
+          <p:cNvSpPr/>
+          <p:nvPr/>
+        </p:nvSpPr>
+        <p:spPr>
+          <a:xfrm>
+            <a:off x="3840480" y="3310128"/>
+            <a:ext cx="91440" cy="2039112"/>
+          </a:xfrm>
+          <a:prstGeom prst="rect">
+            <a:avLst/>
+          </a:prstGeom>
+          <a:solidFill>
+            <a:srgbClr val="E8402A"/>
+          </a:solidFill>
+          <a:ln>
+            <a:noFill/>
+          </a:ln>
+          <a:effectLst/>
+        </p:spPr>
+        <p:style>
+          <a:lnRef idx="1">
+            <a:schemeClr val="accent1"/>
+          </a:lnRef>
+          <a:fillRef idx="3">
+            <a:schemeClr val="accent1"/>
+          </a:fillRef>
+          <a:effectRef idx="2">
+            <a:schemeClr val="accent1"/>
+          </a:effectRef>
+          <a:fontRef idx="minor">
+            <a:schemeClr val="lt1"/>
+          </a:fontRef>
+        </p:style>
+        <p:txBody>
+          <a:bodyPr rtlCol="0" anchor="ctr"/>
+          <a:lstStyle/>
+          <a:p>
+            <a:pPr algn="ctr"/>
+          </a:p>
+        </p:txBody>
+      </p:sp>
+      <p:sp>
+        <p:nvSpPr>
+          <p:cNvPr id="21" name="TextBox 20"/>
+          <p:cNvSpPr txBox="1"/>
+          <p:nvPr/>
+        </p:nvSpPr>
+        <p:spPr>
+          <a:xfrm>
+            <a:off x="4078224" y="3419856"/>
+            <a:ext cx="3474720" cy="365760"/>
+          </a:xfrm>
+          <a:prstGeom prst="rect">
+            <a:avLst/>
+          </a:prstGeom>
+          <a:noFill/>
+        </p:spPr>
+        <p:txBody>
+          <a:bodyPr wrap="square" anchor="t" lIns="25400" rIns="25400" tIns="25400" bIns="25400">
+            <a:spAutoFit/>
+          </a:bodyPr>
+          <a:lstStyle/>
+          <a:p>
+            <a:pPr algn="l">
+              <a:spcBef>
+                <a:spcPts val="0"/>
+              </a:spcBef>
+              <a:spcAft>
+                <a:spcPts val="200"/>
+              </a:spcAft>
+            </a:pPr>
+            <a:r>
+              <a:rPr sz="1400" b="1">
+                <a:solidFill>
+                  <a:srgbClr val="E8402A"/>
+                </a:solidFill>
+                <a:latin typeface="PingFang SC"/>
+                <a:ea typeface="PingFang SC"/>
+              </a:rPr>
+              <a:t>② 战略价值</a:t>
+            </a:r>
+          </a:p>
+        </p:txBody>
+      </p:sp>
+      <p:sp>
+        <p:nvSpPr>
+          <p:cNvPr id="22" name="TextBox 21"/>
+          <p:cNvSpPr txBox="1"/>
+          <p:nvPr/>
+        </p:nvSpPr>
+        <p:spPr>
+          <a:xfrm>
+            <a:off x="4096512" y="3767328"/>
+            <a:ext cx="3383280" cy="2743200"/>
+          </a:xfrm>
+          <a:prstGeom prst="rect">
+            <a:avLst/>
+          </a:prstGeom>
+          <a:noFill/>
+        </p:spPr>
+        <p:txBody>
+          <a:bodyPr wrap="square" anchor="t" lIns="25400" rIns="25400" tIns="25400" bIns="25400">
+            <a:spAutoFit/>
+          </a:bodyPr>
+          <a:lstStyle/>
+          <a:p>
+            <a:pPr algn="l">
+              <a:lnSpc>
+                <a:spcPct val="108000"/>
+              </a:lnSpc>
+              <a:spcBef>
+                <a:spcPts val="0"/>
+              </a:spcBef>
+              <a:spcAft>
+                <a:spcPts val="800"/>
+              </a:spcAft>
+            </a:pPr>
+            <a:r>
+              <a:rPr sz="1100" b="1">
+                <a:solidFill>
+                  <a:srgbClr val="E8402A"/>
+                </a:solidFill>
+                <a:latin typeface="PingFang SC"/>
+                <a:ea typeface="PingFang SC"/>
+              </a:rPr>
+              <a:t>▪ </a:t>
+            </a:r>
+            <a:r>
+              <a:rPr sz="1100" b="1">
+                <a:solidFill>
+                  <a:srgbClr val="1A1A1A"/>
+                </a:solidFill>
+                <a:latin typeface="PingFang SC"/>
+                <a:ea typeface="PingFang SC"/>
+              </a:rPr>
+              <a:t>在「自有专有数据」上构建领域专用 Agent，数据不出治理边界</a:t>
+            </a:r>
+          </a:p>
+          <a:p>
+            <a:pPr algn="l">
+              <a:lnSpc>
+                <a:spcPct val="108000"/>
+              </a:lnSpc>
+              <a:spcBef>
+                <a:spcPts val="0"/>
+              </a:spcBef>
+              <a:spcAft>
+                <a:spcPts val="800"/>
+              </a:spcAft>
+            </a:pPr>
+            <a:r>
+              <a:rPr sz="1100" b="1">
+                <a:solidFill>
+                  <a:srgbClr val="E8402A"/>
+                </a:solidFill>
+                <a:latin typeface="PingFang SC"/>
+                <a:ea typeface="PingFang SC"/>
+              </a:rPr>
+              <a:t>▪ </a:t>
+            </a:r>
+            <a:r>
+              <a:rPr sz="1100" b="0">
+                <a:solidFill>
+                  <a:srgbClr val="5F5F5F"/>
+                </a:solidFill>
+                <a:latin typeface="PingFang SC"/>
+                <a:ea typeface="PingFang SC"/>
+              </a:rPr>
+              <a:t>Constitutional AI 安全 × Unity 治理 = 受治理的企业级 Agent</a:t>
+            </a:r>
+          </a:p>
+          <a:p>
+            <a:pPr algn="l">
+              <a:lnSpc>
+                <a:spcPct val="108000"/>
+              </a:lnSpc>
+              <a:spcBef>
+                <a:spcPts val="0"/>
+              </a:spcBef>
+              <a:spcAft>
+                <a:spcPts val="800"/>
+              </a:spcAft>
+            </a:pPr>
+            <a:r>
+              <a:rPr sz="1100" b="1">
+                <a:solidFill>
+                  <a:srgbClr val="E8402A"/>
+                </a:solidFill>
+                <a:latin typeface="PingFang SC"/>
+                <a:ea typeface="PingFang SC"/>
+              </a:rPr>
+              <a:t>▪ </a:t>
+            </a:r>
+            <a:r>
+              <a:rPr sz="1100" b="0">
+                <a:solidFill>
+                  <a:srgbClr val="5F5F5F"/>
+                </a:solidFill>
+                <a:latin typeface="PingFang SC"/>
+                <a:ea typeface="PingFang SC"/>
+              </a:rPr>
+              <a:t>把 Agent 价值锚定在企业最敏感数据上 → 高粘性、高 Token 消耗</a:t>
+            </a:r>
+          </a:p>
+          <a:p>
+            <a:pPr algn="l">
+              <a:lnSpc>
+                <a:spcPct val="108000"/>
+              </a:lnSpc>
+              <a:spcBef>
+                <a:spcPts val="0"/>
+              </a:spcBef>
+              <a:spcAft>
+                <a:spcPts val="800"/>
+              </a:spcAft>
+            </a:pPr>
+            <a:r>
+              <a:rPr sz="1100" b="1">
+                <a:solidFill>
+                  <a:srgbClr val="E8402A"/>
+                </a:solidFill>
+                <a:latin typeface="PingFang SC"/>
+                <a:ea typeface="PingFang SC"/>
+              </a:rPr>
+              <a:t>▪ </a:t>
+            </a:r>
+            <a:r>
+              <a:rPr sz="1100" b="0">
+                <a:solidFill>
+                  <a:srgbClr val="5F5F5F"/>
+                </a:solidFill>
+                <a:latin typeface="PingFang SC"/>
+                <a:ea typeface="PingFang SC"/>
+              </a:rPr>
+              <a:t>与 Snowflake 形成「双数据平台」双覆盖</a:t>
+            </a:r>
+          </a:p>
+        </p:txBody>
+      </p:sp>
+      <p:sp>
+        <p:nvSpPr>
+          <p:cNvPr id="23" name="Rectangle 22"/>
+          <p:cNvSpPr/>
+          <p:nvPr/>
+        </p:nvSpPr>
+        <p:spPr>
+          <a:xfrm>
+            <a:off x="7845552" y="3310128"/>
+            <a:ext cx="3840480" cy="2039112"/>
+          </a:xfrm>
+          <a:prstGeom prst="rect">
+            <a:avLst/>
+          </a:prstGeom>
+          <a:solidFill>
+            <a:srgbClr val="FFFFFF"/>
+          </a:solidFill>
+          <a:ln w="12700">
+            <a:solidFill>
+              <a:srgbClr val="E3DDD3"/>
+            </a:solidFill>
+          </a:ln>
+          <a:effectLst/>
+        </p:spPr>
+        <p:style>
+          <a:lnRef idx="1">
+            <a:schemeClr val="accent1"/>
+          </a:lnRef>
+          <a:fillRef idx="3">
+            <a:schemeClr val="accent1"/>
+          </a:fillRef>
+          <a:effectRef idx="2">
+            <a:schemeClr val="accent1"/>
+          </a:effectRef>
+          <a:fontRef idx="minor">
+            <a:schemeClr val="lt1"/>
+          </a:fontRef>
+        </p:style>
+        <p:txBody>
+          <a:bodyPr rtlCol="0" anchor="ctr"/>
+          <a:lstStyle/>
+          <a:p>
+            <a:pPr algn="ctr"/>
+          </a:p>
+        </p:txBody>
+      </p:sp>
+      <p:sp>
+        <p:nvSpPr>
+          <p:cNvPr id="24" name="Rectangle 23"/>
+          <p:cNvSpPr/>
+          <p:nvPr/>
+        </p:nvSpPr>
+        <p:spPr>
+          <a:xfrm>
+            <a:off x="7845552" y="3310128"/>
+            <a:ext cx="91440" cy="2039112"/>
+          </a:xfrm>
+          <a:prstGeom prst="rect">
+            <a:avLst/>
+          </a:prstGeom>
+          <a:solidFill>
+            <a:srgbClr val="E8402A"/>
+          </a:solidFill>
+          <a:ln>
+            <a:noFill/>
+          </a:ln>
+          <a:effectLst/>
+        </p:spPr>
+        <p:style>
+          <a:lnRef idx="1">
+            <a:schemeClr val="accent1"/>
+          </a:lnRef>
+          <a:fillRef idx="3">
+            <a:schemeClr val="accent1"/>
+          </a:fillRef>
+          <a:effectRef idx="2">
+            <a:schemeClr val="accent1"/>
+          </a:effectRef>
+          <a:fontRef idx="minor">
+            <a:schemeClr val="lt1"/>
+          </a:fontRef>
+        </p:style>
+        <p:txBody>
+          <a:bodyPr rtlCol="0" anchor="ctr"/>
+          <a:lstStyle/>
+          <a:p>
+            <a:pPr algn="ctr"/>
+          </a:p>
+        </p:txBody>
+      </p:sp>
+      <p:sp>
+        <p:nvSpPr>
+          <p:cNvPr id="25" name="TextBox 24"/>
+          <p:cNvSpPr txBox="1"/>
+          <p:nvPr/>
+        </p:nvSpPr>
+        <p:spPr>
+          <a:xfrm>
+            <a:off x="8083296" y="3419856"/>
+            <a:ext cx="3474720" cy="365760"/>
+          </a:xfrm>
+          <a:prstGeom prst="rect">
+            <a:avLst/>
+          </a:prstGeom>
+          <a:noFill/>
+        </p:spPr>
+        <p:txBody>
+          <a:bodyPr wrap="square" anchor="t" lIns="25400" rIns="25400" tIns="25400" bIns="25400">
+            <a:spAutoFit/>
+          </a:bodyPr>
+          <a:lstStyle/>
+          <a:p>
+            <a:pPr algn="l">
+              <a:spcBef>
+                <a:spcPts val="0"/>
+              </a:spcBef>
+              <a:spcAft>
+                <a:spcPts val="200"/>
+              </a:spcAft>
+            </a:pPr>
+            <a:r>
+              <a:rPr sz="1400" b="1">
+                <a:solidFill>
+                  <a:srgbClr val="E8402A"/>
+                </a:solidFill>
+                <a:latin typeface="PingFang SC"/>
+                <a:ea typeface="PingFang SC"/>
+              </a:rPr>
+              <a:t>③ 客户与案例</a:t>
+            </a:r>
+          </a:p>
+        </p:txBody>
+      </p:sp>
+      <p:sp>
+        <p:nvSpPr>
+          <p:cNvPr id="26" name="TextBox 25"/>
+          <p:cNvSpPr txBox="1"/>
+          <p:nvPr/>
+        </p:nvSpPr>
+        <p:spPr>
+          <a:xfrm>
+            <a:off x="8101584" y="3767328"/>
+            <a:ext cx="3383280" cy="2743200"/>
+          </a:xfrm>
+          <a:prstGeom prst="rect">
+            <a:avLst/>
+          </a:prstGeom>
+          <a:noFill/>
+        </p:spPr>
+        <p:txBody>
+          <a:bodyPr wrap="square" anchor="t" lIns="25400" rIns="25400" tIns="25400" bIns="25400">
+            <a:spAutoFit/>
+          </a:bodyPr>
+          <a:lstStyle/>
+          <a:p>
+            <a:pPr algn="l">
+              <a:lnSpc>
+                <a:spcPct val="108000"/>
+              </a:lnSpc>
+              <a:spcBef>
+                <a:spcPts val="0"/>
+              </a:spcBef>
+              <a:spcAft>
+                <a:spcPts val="800"/>
+              </a:spcAft>
+            </a:pPr>
+            <a:r>
+              <a:rPr sz="1100" b="1">
+                <a:solidFill>
+                  <a:srgbClr val="E8402A"/>
+                </a:solidFill>
+                <a:latin typeface="PingFang SC"/>
+                <a:ea typeface="PingFang SC"/>
+              </a:rPr>
+              <a:t>▪ </a:t>
+            </a:r>
+            <a:r>
+              <a:rPr sz="1100" b="1">
+                <a:solidFill>
+                  <a:srgbClr val="1A1A1A"/>
+                </a:solidFill>
+                <a:latin typeface="PingFang SC"/>
+                <a:ea typeface="PingFang SC"/>
+              </a:rPr>
+              <a:t>Block（原 Square）：以该合作为引擎，</a:t>
+            </a:r>
+          </a:p>
+          <a:p>
+            <a:pPr algn="l">
+              <a:lnSpc>
+                <a:spcPct val="108000"/>
+              </a:lnSpc>
+              <a:spcBef>
+                <a:spcPts val="0"/>
+              </a:spcBef>
+              <a:spcAft>
+                <a:spcPts val="800"/>
+              </a:spcAft>
+            </a:pPr>
+            <a:r>
+              <a:rPr sz="1100" b="1">
+                <a:solidFill>
+                  <a:srgbClr val="E8402A"/>
+                </a:solidFill>
+                <a:latin typeface="PingFang SC"/>
+                <a:ea typeface="PingFang SC"/>
+              </a:rPr>
+              <a:t>▪ </a:t>
+            </a:r>
+            <a:r>
+              <a:rPr sz="1100" b="0">
+                <a:solidFill>
+                  <a:srgbClr val="5F5F5F"/>
+                </a:solidFill>
+                <a:latin typeface="PingFang SC"/>
+                <a:ea typeface="PingFang SC"/>
+              </a:rPr>
+              <a:t>  驱动其开源 AI Agent「codename goose」</a:t>
+            </a:r>
+          </a:p>
+          <a:p>
+            <a:pPr algn="l">
+              <a:lnSpc>
+                <a:spcPct val="108000"/>
+              </a:lnSpc>
+              <a:spcBef>
+                <a:spcPts val="0"/>
+              </a:spcBef>
+              <a:spcAft>
+                <a:spcPts val="800"/>
+              </a:spcAft>
+            </a:pPr>
+            <a:r>
+              <a:rPr sz="1100" b="1">
+                <a:solidFill>
+                  <a:srgbClr val="E8402A"/>
+                </a:solidFill>
+                <a:latin typeface="PingFang SC"/>
+                <a:ea typeface="PingFang SC"/>
+              </a:rPr>
+              <a:t>▪ </a:t>
+            </a:r>
+            <a:r>
+              <a:rPr sz="1100" b="0">
+                <a:solidFill>
+                  <a:srgbClr val="5F5F5F"/>
+                </a:solidFill>
+                <a:latin typeface="PingFang SC"/>
+                <a:ea typeface="PingFang SC"/>
+              </a:rPr>
+              <a:t>面向 Databricks 上万家企业客户的存量数据资产</a:t>
+            </a:r>
+          </a:p>
+          <a:p>
+            <a:pPr algn="l">
+              <a:lnSpc>
+                <a:spcPct val="108000"/>
+              </a:lnSpc>
+              <a:spcBef>
+                <a:spcPts val="0"/>
+              </a:spcBef>
+              <a:spcAft>
+                <a:spcPts val="800"/>
+              </a:spcAft>
+            </a:pPr>
+            <a:r>
+              <a:rPr sz="1100" b="1">
+                <a:solidFill>
+                  <a:srgbClr val="E8402A"/>
+                </a:solidFill>
+                <a:latin typeface="PingFang SC"/>
+                <a:ea typeface="PingFang SC"/>
+              </a:rPr>
+              <a:t>▪ </a:t>
+            </a:r>
+            <a:r>
+              <a:rPr sz="1100" b="0">
+                <a:solidFill>
+                  <a:srgbClr val="5F5F5F"/>
+                </a:solidFill>
+                <a:latin typeface="PingFang SC"/>
+                <a:ea typeface="PingFang SC"/>
+              </a:rPr>
+              <a:t>数据科学 / 工程团队的 Agent 开发场景</a:t>
+            </a:r>
+          </a:p>
+        </p:txBody>
+      </p:sp>
+      <p:sp>
+        <p:nvSpPr>
+          <p:cNvPr id="27" name="Rectangle 26"/>
+          <p:cNvSpPr/>
+          <p:nvPr/>
+        </p:nvSpPr>
+        <p:spPr>
+          <a:xfrm>
+            <a:off x="502920" y="5504688"/>
+            <a:ext cx="11183112" cy="896112"/>
+          </a:xfrm>
+          <a:prstGeom prst="rect">
+            <a:avLst/>
+          </a:prstGeom>
+          <a:solidFill>
+            <a:srgbClr val="2B2B2B"/>
+          </a:solidFill>
+          <a:ln>
+            <a:noFill/>
+          </a:ln>
+          <a:effectLst/>
+        </p:spPr>
+        <p:style>
+          <a:lnRef idx="1">
+            <a:schemeClr val="accent1"/>
+          </a:lnRef>
+          <a:fillRef idx="3">
+            <a:schemeClr val="accent1"/>
+          </a:fillRef>
+          <a:effectRef idx="2">
+            <a:schemeClr val="accent1"/>
+          </a:effectRef>
+          <a:fontRef idx="minor">
+            <a:schemeClr val="lt1"/>
+          </a:fontRef>
+        </p:style>
+        <p:txBody>
+          <a:bodyPr rtlCol="0" anchor="ctr"/>
+          <a:lstStyle/>
+          <a:p>
+            <a:pPr algn="ctr"/>
+          </a:p>
+        </p:txBody>
+      </p:sp>
+      <p:sp>
+        <p:nvSpPr>
+          <p:cNvPr id="28" name="Rectangle 27"/>
+          <p:cNvSpPr/>
+          <p:nvPr/>
+        </p:nvSpPr>
+        <p:spPr>
+          <a:xfrm>
+            <a:off x="502920" y="5504688"/>
+            <a:ext cx="109728" cy="896112"/>
+          </a:xfrm>
+          <a:prstGeom prst="rect">
+            <a:avLst/>
+          </a:prstGeom>
+          <a:solidFill>
+            <a:srgbClr val="E8402A"/>
+          </a:solidFill>
+          <a:ln>
+            <a:noFill/>
+          </a:ln>
+          <a:effectLst/>
+        </p:spPr>
+        <p:style>
+          <a:lnRef idx="1">
+            <a:schemeClr val="accent1"/>
+          </a:lnRef>
+          <a:fillRef idx="3">
+            <a:schemeClr val="accent1"/>
+          </a:fillRef>
+          <a:effectRef idx="2">
+            <a:schemeClr val="accent1"/>
+          </a:effectRef>
+          <a:fontRef idx="minor">
+            <a:schemeClr val="lt1"/>
+          </a:fontRef>
+        </p:style>
+        <p:txBody>
+          <a:bodyPr rtlCol="0" anchor="ctr"/>
+          <a:lstStyle/>
+          <a:p>
+            <a:pPr algn="ctr"/>
+          </a:p>
+        </p:txBody>
+      </p:sp>
+      <p:sp>
+        <p:nvSpPr>
+          <p:cNvPr id="29" name="TextBox 28"/>
+          <p:cNvSpPr txBox="1"/>
+          <p:nvPr/>
+        </p:nvSpPr>
+        <p:spPr>
+          <a:xfrm>
+            <a:off x="804672" y="5614416"/>
+            <a:ext cx="10698480" cy="713232"/>
+          </a:xfrm>
+          <a:prstGeom prst="rect">
+            <a:avLst/>
+          </a:prstGeom>
+          <a:noFill/>
+        </p:spPr>
+        <p:txBody>
+          <a:bodyPr wrap="square" anchor="ctr" lIns="25400" rIns="25400" tIns="25400" bIns="25400">
+            <a:spAutoFit/>
+          </a:bodyPr>
+          <a:lstStyle/>
+          <a:p>
+            <a:pPr algn="l">
+              <a:lnSpc>
+                <a:spcPct val="108000"/>
+              </a:lnSpc>
+              <a:spcBef>
+                <a:spcPts val="0"/>
+              </a:spcBef>
+              <a:spcAft>
+                <a:spcPts val="200"/>
+              </a:spcAft>
+            </a:pPr>
+            <a:r>
+              <a:rPr sz="1250" b="1">
+                <a:solidFill>
+                  <a:srgbClr val="D97757"/>
+                </a:solidFill>
+                <a:latin typeface="PingFang SC"/>
+                <a:ea typeface="PingFang SC"/>
+              </a:rPr>
+              <a:t>战略本质：</a:t>
+            </a:r>
+            <a:r>
+              <a:rPr sz="1200" b="0">
+                <a:solidFill>
+                  <a:srgbClr val="FFFFFF"/>
+                </a:solidFill>
+                <a:latin typeface="PingFang SC"/>
+                <a:ea typeface="PingFang SC"/>
+              </a:rPr>
+              <a:t>数据在哪，智能就去哪。Databricks 出「治理 + 数据 + 客户」，Claude 出「智能」，Anthropic 借此把 Agent 牢牢嵌入企业专有数据之上。</a:t>
+            </a:r>
+          </a:p>
+        </p:txBody>
+      </p:sp>
+      <p:sp>
+        <p:nvSpPr>
+          <p:cNvPr id="30" name="TextBox 29"/>
+          <p:cNvSpPr txBox="1"/>
+          <p:nvPr/>
+        </p:nvSpPr>
+        <p:spPr>
+          <a:xfrm>
+            <a:off x="502920" y="6528816"/>
+            <a:ext cx="11155680" cy="274320"/>
+          </a:xfrm>
+          <a:prstGeom prst="rect">
+            <a:avLst/>
+          </a:prstGeom>
+          <a:noFill/>
+        </p:spPr>
+        <p:txBody>
+          <a:bodyPr wrap="square" anchor="t" lIns="25400" rIns="25400" tIns="25400" bIns="25400">
+            <a:spAutoFit/>
+          </a:bodyPr>
+          <a:lstStyle/>
+          <a:p>
+            <a:pPr algn="l">
+              <a:spcBef>
+                <a:spcPts val="0"/>
+              </a:spcBef>
+              <a:spcAft>
+                <a:spcPts val="200"/>
+              </a:spcAft>
+            </a:pPr>
+            <a:r>
+              <a:rPr sz="800" b="0">
+                <a:solidFill>
+                  <a:srgbClr val="5F5F5F"/>
+                </a:solidFill>
+                <a:latin typeface="PingFang SC"/>
+                <a:ea typeface="PingFang SC"/>
+              </a:rPr>
+              <a:t>资料来源：Databricks 官方新闻稿与博客、TechTarget、Technology Magazine、NAND Research（2025.03–2026）；金额为公开报道口径。</a:t>
+            </a:r>
+          </a:p>
+        </p:txBody>
+      </p:sp>
+    </p:spTree>
+  </p:cSld>
+  <p:clrMapOvr>
+    <a:masterClrMapping/>
+  </p:clrMapOvr>
+</p:sld>
+</file>
+
+<file path=ppt/slides/slide3.xml><?xml version="1.0" encoding="utf-8"?>
+<p:sld xmlns:a="http://schemas.openxmlformats.org/drawingml/2006/main" xmlns:p="http://schemas.openxmlformats.org/presentationml/2006/main" xmlns:r="http://schemas.openxmlformats.org/officeDocument/2006/relationships">
+  <p:cSld>
+    <p:spTree>
+      <p:nvGrpSpPr>
+        <p:cNvPr id="1" name=""/>
+        <p:cNvGrpSpPr/>
+        <p:nvPr/>
+      </p:nvGrpSpPr>
+      <p:grpSpPr/>
+      <p:sp>
+        <p:nvSpPr>
+          <p:cNvPr id="2" name="Rectangle 1"/>
+          <p:cNvSpPr/>
+          <p:nvPr/>
+        </p:nvSpPr>
+        <p:spPr>
+          <a:xfrm>
+            <a:off x="0" y="0"/>
+            <a:ext cx="12191695" cy="6858000"/>
+          </a:xfrm>
+          <a:prstGeom prst="rect">
+            <a:avLst/>
+          </a:prstGeom>
+          <a:solidFill>
+            <a:srgbClr val="F7F4EF"/>
+          </a:solidFill>
+          <a:ln>
+            <a:noFill/>
+          </a:ln>
+          <a:effectLst/>
+        </p:spPr>
+        <p:style>
+          <a:lnRef idx="1">
+            <a:schemeClr val="accent1"/>
+          </a:lnRef>
+          <a:fillRef idx="3">
+            <a:schemeClr val="accent1"/>
+          </a:fillRef>
+          <a:effectRef idx="2">
+            <a:schemeClr val="accent1"/>
+          </a:effectRef>
+          <a:fontRef idx="minor">
+            <a:schemeClr val="lt1"/>
+          </a:fontRef>
+        </p:style>
+        <p:txBody>
+          <a:bodyPr rtlCol="0" anchor="ctr"/>
+          <a:lstStyle/>
+          <a:p>
+            <a:pPr algn="ctr"/>
+          </a:p>
+        </p:txBody>
+      </p:sp>
+      <p:sp>
+        <p:nvSpPr>
+          <p:cNvPr id="3" name="Rectangle 2"/>
+          <p:cNvSpPr/>
+          <p:nvPr/>
+        </p:nvSpPr>
+        <p:spPr>
+          <a:xfrm>
+            <a:off x="0" y="0"/>
+            <a:ext cx="12191695" cy="164592"/>
+          </a:xfrm>
+          <a:prstGeom prst="rect">
+            <a:avLst/>
+          </a:prstGeom>
+          <a:solidFill>
+            <a:srgbClr val="D97757"/>
+          </a:solidFill>
+          <a:ln>
+            <a:noFill/>
+          </a:ln>
+          <a:effectLst/>
+        </p:spPr>
+        <p:style>
+          <a:lnRef idx="1">
+            <a:schemeClr val="accent1"/>
+          </a:lnRef>
+          <a:fillRef idx="3">
+            <a:schemeClr val="accent1"/>
+          </a:fillRef>
+          <a:effectRef idx="2">
+            <a:schemeClr val="accent1"/>
+          </a:effectRef>
+          <a:fontRef idx="minor">
+            <a:schemeClr val="lt1"/>
+          </a:fontRef>
+        </p:style>
+        <p:txBody>
+          <a:bodyPr rtlCol="0" anchor="ctr"/>
+          <a:lstStyle/>
+          <a:p>
+            <a:pPr algn="ctr"/>
+          </a:p>
+        </p:txBody>
+      </p:sp>
+      <p:sp>
+        <p:nvSpPr>
+          <p:cNvPr id="4" name="TextBox 3"/>
+          <p:cNvSpPr txBox="1"/>
+          <p:nvPr/>
+        </p:nvSpPr>
+        <p:spPr>
+          <a:xfrm>
+            <a:off x="502920" y="292608"/>
+            <a:ext cx="8778240" cy="868680"/>
+          </a:xfrm>
+          <a:prstGeom prst="rect">
+            <a:avLst/>
+          </a:prstGeom>
+          <a:noFill/>
+        </p:spPr>
+        <p:txBody>
+          <a:bodyPr wrap="square" anchor="t" lIns="25400" rIns="25400" tIns="25400" bIns="25400">
+            <a:spAutoFit/>
+          </a:bodyPr>
+          <a:lstStyle/>
+          <a:p>
+            <a:pPr algn="l">
+              <a:spcBef>
+                <a:spcPts val="0"/>
+              </a:spcBef>
+              <a:spcAft>
+                <a:spcPts val="400"/>
+              </a:spcAft>
+            </a:pPr>
+            <a:r>
+              <a:rPr sz="3000" b="1">
+                <a:solidFill>
+                  <a:srgbClr val="1A1A1A"/>
+                </a:solidFill>
+                <a:latin typeface="PingFang SC"/>
+                <a:ea typeface="PingFang SC"/>
+              </a:rPr>
+              <a:t>Anthropic × Snowflake</a:t>
+            </a:r>
+          </a:p>
+          <a:p>
+            <a:pPr algn="l">
+              <a:spcBef>
+                <a:spcPts val="0"/>
+              </a:spcBef>
+              <a:spcAft>
+                <a:spcPts val="400"/>
+              </a:spcAft>
+            </a:pPr>
+            <a:r>
+              <a:rPr sz="1400" b="0">
+                <a:solidFill>
+                  <a:srgbClr val="5F5F5F"/>
+                </a:solidFill>
+                <a:latin typeface="PingFang SC"/>
+                <a:ea typeface="PingFang SC"/>
+              </a:rPr>
+              <a:t>$200M 多年期协议 + 联合 GTM —— 用「受治理的 AI」打入大型企业生产</a:t>
+            </a:r>
+          </a:p>
+        </p:txBody>
+      </p:sp>
+      <p:sp>
+        <p:nvSpPr>
+          <p:cNvPr id="5" name="Rectangle 4"/>
+          <p:cNvSpPr/>
+          <p:nvPr/>
+        </p:nvSpPr>
+        <p:spPr>
+          <a:xfrm>
+            <a:off x="9601200" y="384048"/>
+            <a:ext cx="2103120" cy="502920"/>
+          </a:xfrm>
+          <a:prstGeom prst="rect">
+            <a:avLst/>
+          </a:prstGeom>
+          <a:solidFill>
+            <a:srgbClr val="29B5E8"/>
+          </a:solidFill>
+          <a:ln>
+            <a:noFill/>
+          </a:ln>
+          <a:effectLst/>
+        </p:spPr>
+        <p:style>
+          <a:lnRef idx="1">
+            <a:schemeClr val="accent1"/>
+          </a:lnRef>
+          <a:fillRef idx="3">
+            <a:schemeClr val="accent1"/>
+          </a:fillRef>
+          <a:effectRef idx="2">
+            <a:schemeClr val="accent1"/>
+          </a:effectRef>
+          <a:fontRef idx="minor">
+            <a:schemeClr val="lt1"/>
+          </a:fontRef>
+        </p:style>
+        <p:txBody>
+          <a:bodyPr rtlCol="0" anchor="ctr"/>
+          <a:lstStyle/>
+          <a:p>
+            <a:pPr algn="ctr"/>
+            <a:r>
+              <a:rPr sz="1400" b="1">
+                <a:solidFill>
+                  <a:srgbClr val="FFFFFF"/>
+                </a:solidFill>
+                <a:latin typeface="PingFang SC"/>
+                <a:ea typeface="PingFang SC"/>
+              </a:rPr>
+              <a:t>多年 · $200M</a:t>
+            </a:r>
+          </a:p>
+        </p:txBody>
+      </p:sp>
+      <p:sp>
+        <p:nvSpPr>
+          <p:cNvPr id="6" name="Rectangle 5"/>
+          <p:cNvSpPr/>
+          <p:nvPr/>
+        </p:nvSpPr>
+        <p:spPr>
+          <a:xfrm>
+            <a:off x="502920" y="1325880"/>
+            <a:ext cx="3154680" cy="4023360"/>
+          </a:xfrm>
+          <a:prstGeom prst="rect">
+            <a:avLst/>
+          </a:prstGeom>
+          <a:solidFill>
+            <a:srgbClr val="2B2B2B"/>
+          </a:solidFill>
+          <a:ln>
+            <a:noFill/>
+          </a:ln>
+          <a:effectLst/>
+        </p:spPr>
+        <p:style>
+          <a:lnRef idx="1">
+            <a:schemeClr val="accent1"/>
+          </a:lnRef>
+          <a:fillRef idx="3">
+            <a:schemeClr val="accent1"/>
+          </a:fillRef>
+          <a:effectRef idx="2">
+            <a:schemeClr val="accent1"/>
+          </a:effectRef>
+          <a:fontRef idx="minor">
+            <a:schemeClr val="lt1"/>
+          </a:fontRef>
+        </p:style>
+        <p:txBody>
+          <a:bodyPr rtlCol="0" anchor="ctr"/>
+          <a:lstStyle/>
+          <a:p>
+            <a:pPr algn="ctr"/>
+          </a:p>
+        </p:txBody>
+      </p:sp>
+      <p:sp>
+        <p:nvSpPr>
+          <p:cNvPr id="7" name="Rectangle 6"/>
+          <p:cNvSpPr/>
+          <p:nvPr/>
+        </p:nvSpPr>
+        <p:spPr>
+          <a:xfrm>
+            <a:off x="502920" y="1325880"/>
+            <a:ext cx="3154680" cy="566928"/>
+          </a:xfrm>
+          <a:prstGeom prst="rect">
+            <a:avLst/>
+          </a:prstGeom>
+          <a:solidFill>
+            <a:srgbClr val="29B5E8"/>
+          </a:solidFill>
+          <a:ln>
+            <a:noFill/>
+          </a:ln>
+          <a:effectLst/>
+        </p:spPr>
+        <p:style>
+          <a:lnRef idx="1">
+            <a:schemeClr val="accent1"/>
+          </a:lnRef>
+          <a:fillRef idx="3">
+            <a:schemeClr val="accent1"/>
+          </a:fillRef>
+          <a:effectRef idx="2">
+            <a:schemeClr val="accent1"/>
+          </a:effectRef>
+          <a:fontRef idx="minor">
+            <a:schemeClr val="lt1"/>
+          </a:fontRef>
+        </p:style>
+        <p:txBody>
+          <a:bodyPr rtlCol="0" anchor="ctr"/>
+          <a:lstStyle/>
+          <a:p>
+            <a:pPr algn="ctr"/>
+          </a:p>
+        </p:txBody>
+      </p:sp>
+      <p:sp>
+        <p:nvSpPr>
+          <p:cNvPr id="8" name="TextBox 7"/>
+          <p:cNvSpPr txBox="1"/>
+          <p:nvPr/>
+        </p:nvSpPr>
+        <p:spPr>
+          <a:xfrm>
+            <a:off x="704088" y="1417320"/>
+            <a:ext cx="2788920" cy="457200"/>
+          </a:xfrm>
+          <a:prstGeom prst="rect">
+            <a:avLst/>
+          </a:prstGeom>
+          <a:noFill/>
+        </p:spPr>
+        <p:txBody>
+          <a:bodyPr wrap="square" anchor="ctr" lIns="25400" rIns="25400" tIns="25400" bIns="25400">
+            <a:spAutoFit/>
+          </a:bodyPr>
+          <a:lstStyle/>
+          <a:p>
+            <a:pPr algn="l">
+              <a:spcBef>
+                <a:spcPts val="0"/>
+              </a:spcBef>
+              <a:spcAft>
+                <a:spcPts val="200"/>
+              </a:spcAft>
+            </a:pPr>
+            <a:r>
+              <a:rPr sz="1300" b="1">
+                <a:solidFill>
+                  <a:srgbClr val="FFFFFF"/>
+                </a:solidFill>
+                <a:latin typeface="PingFang SC"/>
+                <a:ea typeface="PingFang SC"/>
+              </a:rPr>
+              <a:t>合作快照 · Snowflake</a:t>
+            </a:r>
+          </a:p>
+        </p:txBody>
+      </p:sp>
+      <p:sp>
+        <p:nvSpPr>
+          <p:cNvPr id="9" name="TextBox 8"/>
+          <p:cNvSpPr txBox="1"/>
+          <p:nvPr/>
+        </p:nvSpPr>
+        <p:spPr>
+          <a:xfrm>
+            <a:off x="722376" y="2075688"/>
+            <a:ext cx="2734056" cy="566928"/>
+          </a:xfrm>
+          <a:prstGeom prst="rect">
+            <a:avLst/>
+          </a:prstGeom>
+          <a:noFill/>
+        </p:spPr>
+        <p:txBody>
+          <a:bodyPr wrap="square" anchor="t" lIns="25400" rIns="25400" tIns="25400" bIns="25400">
+            <a:spAutoFit/>
+          </a:bodyPr>
+          <a:lstStyle/>
+          <a:p>
+            <a:pPr algn="l">
+              <a:lnSpc>
+                <a:spcPct val="100000"/>
+              </a:lnSpc>
+              <a:spcBef>
+                <a:spcPts val="0"/>
+              </a:spcBef>
+              <a:spcAft>
+                <a:spcPts val="100"/>
+              </a:spcAft>
+            </a:pPr>
+            <a:r>
+              <a:rPr sz="1000" b="0">
+                <a:solidFill>
+                  <a:srgbClr val="B7B1A8"/>
+                </a:solidFill>
+                <a:latin typeface="PingFang SC"/>
+                <a:ea typeface="PingFang SC"/>
+              </a:rPr>
+              <a:t>协议类型</a:t>
+            </a:r>
+          </a:p>
+          <a:p>
+            <a:pPr algn="l">
+              <a:lnSpc>
+                <a:spcPct val="100000"/>
+              </a:lnSpc>
+              <a:spcBef>
+                <a:spcPts val="0"/>
+              </a:spcBef>
+              <a:spcAft>
+                <a:spcPts val="100"/>
+              </a:spcAft>
+            </a:pPr>
+            <a:r>
+              <a:rPr sz="1300" b="1">
+                <a:solidFill>
+                  <a:srgbClr val="FFFFFF"/>
+                </a:solidFill>
+                <a:latin typeface="PingFang SC"/>
+                <a:ea typeface="PingFang SC"/>
+              </a:rPr>
+              <a:t>扩展战略合作</a:t>
+            </a:r>
+          </a:p>
+        </p:txBody>
+      </p:sp>
+      <p:sp>
+        <p:nvSpPr>
+          <p:cNvPr id="10" name="TextBox 9"/>
+          <p:cNvSpPr txBox="1"/>
+          <p:nvPr/>
+        </p:nvSpPr>
+        <p:spPr>
+          <a:xfrm>
+            <a:off x="722376" y="2619756"/>
+            <a:ext cx="2734056" cy="566928"/>
+          </a:xfrm>
+          <a:prstGeom prst="rect">
+            <a:avLst/>
+          </a:prstGeom>
+          <a:noFill/>
+        </p:spPr>
+        <p:txBody>
+          <a:bodyPr wrap="square" anchor="t" lIns="25400" rIns="25400" tIns="25400" bIns="25400">
+            <a:spAutoFit/>
+          </a:bodyPr>
+          <a:lstStyle/>
+          <a:p>
+            <a:pPr algn="l">
+              <a:lnSpc>
+                <a:spcPct val="100000"/>
+              </a:lnSpc>
+              <a:spcBef>
+                <a:spcPts val="0"/>
+              </a:spcBef>
+              <a:spcAft>
+                <a:spcPts val="100"/>
+              </a:spcAft>
+            </a:pPr>
+            <a:r>
+              <a:rPr sz="1000" b="0">
+                <a:solidFill>
+                  <a:srgbClr val="B7B1A8"/>
+                </a:solidFill>
+                <a:latin typeface="PingFang SC"/>
+                <a:ea typeface="PingFang SC"/>
+              </a:rPr>
+              <a:t>期限 / 金额</a:t>
+            </a:r>
+          </a:p>
+          <a:p>
+            <a:pPr algn="l">
+              <a:lnSpc>
+                <a:spcPct val="100000"/>
+              </a:lnSpc>
+              <a:spcBef>
+                <a:spcPts val="0"/>
+              </a:spcBef>
+              <a:spcAft>
+                <a:spcPts val="100"/>
+              </a:spcAft>
+            </a:pPr>
+            <a:r>
+              <a:rPr sz="1300" b="1">
+                <a:solidFill>
+                  <a:srgbClr val="FFFFFF"/>
+                </a:solidFill>
+                <a:latin typeface="PingFang SC"/>
+                <a:ea typeface="PingFang SC"/>
+              </a:rPr>
+              <a:t>多年期 · $200M</a:t>
+            </a:r>
+          </a:p>
+        </p:txBody>
+      </p:sp>
+      <p:sp>
+        <p:nvSpPr>
+          <p:cNvPr id="11" name="TextBox 10"/>
+          <p:cNvSpPr txBox="1"/>
+          <p:nvPr/>
+        </p:nvSpPr>
+        <p:spPr>
+          <a:xfrm>
+            <a:off x="722376" y="3163824"/>
+            <a:ext cx="2734056" cy="566928"/>
+          </a:xfrm>
+          <a:prstGeom prst="rect">
+            <a:avLst/>
+          </a:prstGeom>
+          <a:noFill/>
+        </p:spPr>
+        <p:txBody>
+          <a:bodyPr wrap="square" anchor="t" lIns="25400" rIns="25400" tIns="25400" bIns="25400">
+            <a:spAutoFit/>
+          </a:bodyPr>
+          <a:lstStyle/>
+          <a:p>
+            <a:pPr algn="l">
+              <a:lnSpc>
+                <a:spcPct val="100000"/>
+              </a:lnSpc>
+              <a:spcBef>
+                <a:spcPts val="0"/>
+              </a:spcBef>
+              <a:spcAft>
+                <a:spcPts val="100"/>
+              </a:spcAft>
+            </a:pPr>
+            <a:r>
+              <a:rPr sz="1000" b="0">
+                <a:solidFill>
+                  <a:srgbClr val="B7B1A8"/>
+                </a:solidFill>
+                <a:latin typeface="PingFang SC"/>
+                <a:ea typeface="PingFang SC"/>
+              </a:rPr>
+              <a:t>触达客户</a:t>
+            </a:r>
+          </a:p>
+          <a:p>
+            <a:pPr algn="l">
+              <a:lnSpc>
+                <a:spcPct val="100000"/>
+              </a:lnSpc>
+              <a:spcBef>
+                <a:spcPts val="0"/>
+              </a:spcBef>
+              <a:spcAft>
+                <a:spcPts val="100"/>
+              </a:spcAft>
+            </a:pPr>
+            <a:r>
+              <a:rPr sz="1300" b="1">
+                <a:solidFill>
+                  <a:srgbClr val="FFFFFF"/>
+                </a:solidFill>
+                <a:latin typeface="PingFang SC"/>
+                <a:ea typeface="PingFang SC"/>
+              </a:rPr>
+              <a:t>12,600+ 全球企业</a:t>
+            </a:r>
+          </a:p>
+        </p:txBody>
+      </p:sp>
+      <p:sp>
+        <p:nvSpPr>
+          <p:cNvPr id="12" name="TextBox 11"/>
+          <p:cNvSpPr txBox="1"/>
+          <p:nvPr/>
+        </p:nvSpPr>
+        <p:spPr>
+          <a:xfrm>
+            <a:off x="722376" y="3707892"/>
+            <a:ext cx="2734056" cy="566928"/>
+          </a:xfrm>
+          <a:prstGeom prst="rect">
+            <a:avLst/>
+          </a:prstGeom>
+          <a:noFill/>
+        </p:spPr>
+        <p:txBody>
+          <a:bodyPr wrap="square" anchor="t" lIns="25400" rIns="25400" tIns="25400" bIns="25400">
+            <a:spAutoFit/>
+          </a:bodyPr>
+          <a:lstStyle/>
+          <a:p>
+            <a:pPr algn="l">
+              <a:lnSpc>
+                <a:spcPct val="100000"/>
+              </a:lnSpc>
+              <a:spcBef>
+                <a:spcPts val="0"/>
+              </a:spcBef>
+              <a:spcAft>
+                <a:spcPts val="100"/>
+              </a:spcAft>
+            </a:pPr>
+            <a:r>
+              <a:rPr sz="1000" b="0">
+                <a:solidFill>
+                  <a:srgbClr val="B7B1A8"/>
+                </a:solidFill>
+                <a:latin typeface="PingFang SC"/>
+                <a:ea typeface="PingFang SC"/>
+              </a:rPr>
+              <a:t>覆盖云</a:t>
+            </a:r>
+          </a:p>
+          <a:p>
+            <a:pPr algn="l">
+              <a:lnSpc>
+                <a:spcPct val="100000"/>
+              </a:lnSpc>
+              <a:spcBef>
+                <a:spcPts val="0"/>
+              </a:spcBef>
+              <a:spcAft>
+                <a:spcPts val="100"/>
+              </a:spcAft>
+            </a:pPr>
+            <a:r>
+              <a:rPr sz="1300" b="1">
+                <a:solidFill>
+                  <a:srgbClr val="FFFFFF"/>
+                </a:solidFill>
+                <a:latin typeface="PingFang SC"/>
+                <a:ea typeface="PingFang SC"/>
+              </a:rPr>
+              <a:t>Bedrock / Vertex / Azure</a:t>
+            </a:r>
+          </a:p>
+        </p:txBody>
+      </p:sp>
+      <p:sp>
+        <p:nvSpPr>
+          <p:cNvPr id="13" name="TextBox 12"/>
+          <p:cNvSpPr txBox="1"/>
+          <p:nvPr/>
+        </p:nvSpPr>
+        <p:spPr>
+          <a:xfrm>
+            <a:off x="722376" y="4251960"/>
+            <a:ext cx="2734056" cy="566928"/>
+          </a:xfrm>
+          <a:prstGeom prst="rect">
+            <a:avLst/>
+          </a:prstGeom>
+          <a:noFill/>
+        </p:spPr>
+        <p:txBody>
+          <a:bodyPr wrap="square" anchor="t" lIns="25400" rIns="25400" tIns="25400" bIns="25400">
+            <a:spAutoFit/>
+          </a:bodyPr>
+          <a:lstStyle/>
+          <a:p>
+            <a:pPr algn="l">
+              <a:lnSpc>
+                <a:spcPct val="100000"/>
+              </a:lnSpc>
+              <a:spcBef>
+                <a:spcPts val="0"/>
+              </a:spcBef>
+              <a:spcAft>
+                <a:spcPts val="100"/>
+              </a:spcAft>
+            </a:pPr>
+            <a:r>
+              <a:rPr sz="1000" b="0">
+                <a:solidFill>
+                  <a:srgbClr val="B7B1A8"/>
+                </a:solidFill>
+                <a:latin typeface="PingFang SC"/>
+                <a:ea typeface="PingFang SC"/>
+              </a:rPr>
+              <a:t>联合 GTM</a:t>
+            </a:r>
+          </a:p>
+          <a:p>
+            <a:pPr algn="l">
+              <a:lnSpc>
+                <a:spcPct val="100000"/>
+              </a:lnSpc>
+              <a:spcBef>
+                <a:spcPts val="0"/>
+              </a:spcBef>
+              <a:spcAft>
+                <a:spcPts val="100"/>
+              </a:spcAft>
+            </a:pPr>
+            <a:r>
+              <a:rPr sz="1300" b="1">
+                <a:solidFill>
+                  <a:srgbClr val="FFFFFF"/>
+                </a:solidFill>
+                <a:latin typeface="PingFang SC"/>
+                <a:ea typeface="PingFang SC"/>
+              </a:rPr>
+              <a:t>是（联合销售团队）</a:t>
+            </a:r>
+          </a:p>
+        </p:txBody>
+      </p:sp>
+      <p:sp>
+        <p:nvSpPr>
+          <p:cNvPr id="14" name="TextBox 13"/>
+          <p:cNvSpPr txBox="1"/>
+          <p:nvPr/>
+        </p:nvSpPr>
+        <p:spPr>
+          <a:xfrm>
+            <a:off x="722376" y="4796028"/>
+            <a:ext cx="2734056" cy="566928"/>
+          </a:xfrm>
+          <a:prstGeom prst="rect">
+            <a:avLst/>
+          </a:prstGeom>
+          <a:noFill/>
+        </p:spPr>
+        <p:txBody>
+          <a:bodyPr wrap="square" anchor="t" lIns="25400" rIns="25400" tIns="25400" bIns="25400">
+            <a:spAutoFit/>
+          </a:bodyPr>
+          <a:lstStyle/>
+          <a:p>
+            <a:pPr algn="l">
+              <a:lnSpc>
+                <a:spcPct val="100000"/>
+              </a:lnSpc>
+              <a:spcBef>
+                <a:spcPts val="0"/>
+              </a:spcBef>
+              <a:spcAft>
+                <a:spcPts val="100"/>
+              </a:spcAft>
+            </a:pPr>
+            <a:r>
+              <a:rPr sz="1000" b="0">
+                <a:solidFill>
+                  <a:srgbClr val="B7B1A8"/>
+                </a:solidFill>
+                <a:latin typeface="PingFang SC"/>
+                <a:ea typeface="PingFang SC"/>
+              </a:rPr>
+              <a:t>主题</a:t>
+            </a:r>
+          </a:p>
+          <a:p>
+            <a:pPr algn="l">
+              <a:lnSpc>
+                <a:spcPct val="100000"/>
+              </a:lnSpc>
+              <a:spcBef>
+                <a:spcPts val="0"/>
+              </a:spcBef>
+              <a:spcAft>
+                <a:spcPts val="100"/>
+              </a:spcAft>
+            </a:pPr>
+            <a:r>
+              <a:rPr sz="1300" b="1">
+                <a:solidFill>
+                  <a:srgbClr val="FFFFFF"/>
+                </a:solidFill>
+                <a:latin typeface="PingFang SC"/>
+                <a:ea typeface="PingFang SC"/>
+              </a:rPr>
+              <a:t>Governed AI 受治理 AI</a:t>
+            </a:r>
+          </a:p>
+        </p:txBody>
+      </p:sp>
+      <p:sp>
+        <p:nvSpPr>
+          <p:cNvPr id="15" name="Rectangle 14"/>
+          <p:cNvSpPr/>
+          <p:nvPr/>
+        </p:nvSpPr>
+        <p:spPr>
+          <a:xfrm>
+            <a:off x="3840480" y="1325880"/>
+            <a:ext cx="7845552" cy="1874519"/>
+          </a:xfrm>
+          <a:prstGeom prst="rect">
+            <a:avLst/>
+          </a:prstGeom>
+          <a:solidFill>
+            <a:srgbClr val="FFFFFF"/>
+          </a:solidFill>
+          <a:ln w="12700">
+            <a:solidFill>
+              <a:srgbClr val="E3DDD3"/>
+            </a:solidFill>
+          </a:ln>
+          <a:effectLst/>
+        </p:spPr>
+        <p:style>
+          <a:lnRef idx="1">
+            <a:schemeClr val="accent1"/>
+          </a:lnRef>
+          <a:fillRef idx="3">
+            <a:schemeClr val="accent1"/>
+          </a:fillRef>
+          <a:effectRef idx="2">
+            <a:schemeClr val="accent1"/>
+          </a:effectRef>
+          <a:fontRef idx="minor">
+            <a:schemeClr val="lt1"/>
+          </a:fontRef>
+        </p:style>
+        <p:txBody>
+          <a:bodyPr rtlCol="0" anchor="ctr"/>
+          <a:lstStyle/>
+          <a:p>
+            <a:pPr algn="ctr"/>
+          </a:p>
+        </p:txBody>
+      </p:sp>
+      <p:sp>
+        <p:nvSpPr>
+          <p:cNvPr id="16" name="Rectangle 15"/>
+          <p:cNvSpPr/>
+          <p:nvPr/>
+        </p:nvSpPr>
+        <p:spPr>
+          <a:xfrm>
+            <a:off x="3840480" y="1325880"/>
+            <a:ext cx="91440" cy="1874519"/>
+          </a:xfrm>
+          <a:prstGeom prst="rect">
+            <a:avLst/>
+          </a:prstGeom>
+          <a:solidFill>
+            <a:srgbClr val="29B5E8"/>
+          </a:solidFill>
+          <a:ln>
+            <a:noFill/>
+          </a:ln>
+          <a:effectLst/>
+        </p:spPr>
+        <p:style>
+          <a:lnRef idx="1">
+            <a:schemeClr val="accent1"/>
+          </a:lnRef>
+          <a:fillRef idx="3">
+            <a:schemeClr val="accent1"/>
+          </a:fillRef>
+          <a:effectRef idx="2">
+            <a:schemeClr val="accent1"/>
+          </a:effectRef>
+          <a:fontRef idx="minor">
+            <a:schemeClr val="lt1"/>
+          </a:fontRef>
+        </p:style>
+        <p:txBody>
+          <a:bodyPr rtlCol="0" anchor="ctr"/>
+          <a:lstStyle/>
+          <a:p>
+            <a:pPr algn="ctr"/>
+          </a:p>
+        </p:txBody>
+      </p:sp>
+      <p:sp>
+        <p:nvSpPr>
+          <p:cNvPr id="17" name="TextBox 16"/>
+          <p:cNvSpPr txBox="1"/>
+          <p:nvPr/>
+        </p:nvSpPr>
+        <p:spPr>
+          <a:xfrm>
+            <a:off x="4078224" y="1435608"/>
+            <a:ext cx="7479792" cy="365760"/>
+          </a:xfrm>
+          <a:prstGeom prst="rect">
+            <a:avLst/>
+          </a:prstGeom>
+          <a:noFill/>
+        </p:spPr>
+        <p:txBody>
+          <a:bodyPr wrap="square" anchor="t" lIns="25400" rIns="25400" tIns="25400" bIns="25400">
+            <a:spAutoFit/>
+          </a:bodyPr>
+          <a:lstStyle/>
+          <a:p>
+            <a:pPr algn="l">
+              <a:spcBef>
+                <a:spcPts val="0"/>
+              </a:spcBef>
+              <a:spcAft>
+                <a:spcPts val="200"/>
+              </a:spcAft>
+            </a:pPr>
+            <a:r>
+              <a:rPr sz="1400" b="1">
+                <a:solidFill>
+                  <a:srgbClr val="29B5E8"/>
+                </a:solidFill>
+                <a:latin typeface="PingFang SC"/>
+                <a:ea typeface="PingFang SC"/>
+              </a:rPr>
+              <a:t>① 合作内容与技术整合</a:t>
+            </a:r>
+          </a:p>
+        </p:txBody>
+      </p:sp>
+      <p:sp>
+        <p:nvSpPr>
+          <p:cNvPr id="18" name="TextBox 17"/>
+          <p:cNvSpPr txBox="1"/>
+          <p:nvPr/>
+        </p:nvSpPr>
+        <p:spPr>
+          <a:xfrm>
+            <a:off x="4096512" y="1783080"/>
+            <a:ext cx="7388352" cy="2743200"/>
+          </a:xfrm>
+          <a:prstGeom prst="rect">
+            <a:avLst/>
+          </a:prstGeom>
+          <a:noFill/>
+        </p:spPr>
+        <p:txBody>
+          <a:bodyPr wrap="square" anchor="t" lIns="25400" rIns="25400" tIns="25400" bIns="25400">
+            <a:spAutoFit/>
+          </a:bodyPr>
+          <a:lstStyle/>
+          <a:p>
+            <a:pPr algn="l">
+              <a:lnSpc>
+                <a:spcPct val="108000"/>
+              </a:lnSpc>
+              <a:spcBef>
+                <a:spcPts val="0"/>
+              </a:spcBef>
+              <a:spcAft>
+                <a:spcPts val="800"/>
+              </a:spcAft>
+            </a:pPr>
+            <a:r>
+              <a:rPr sz="1150" b="1">
+                <a:solidFill>
+                  <a:srgbClr val="29B5E8"/>
+                </a:solidFill>
+                <a:latin typeface="PingFang SC"/>
+                <a:ea typeface="PingFang SC"/>
+              </a:rPr>
+              <a:t>▪ </a:t>
+            </a:r>
+            <a:r>
+              <a:rPr sz="1150" b="1">
+                <a:solidFill>
+                  <a:srgbClr val="1A1A1A"/>
+                </a:solidFill>
+                <a:latin typeface="PingFang SC"/>
+                <a:ea typeface="PingFang SC"/>
+              </a:rPr>
+              <a:t>Claude 驱动 Snowflake Cortex Code（编程）</a:t>
+            </a:r>
+          </a:p>
+          <a:p>
+            <a:pPr algn="l">
+              <a:lnSpc>
+                <a:spcPct val="108000"/>
+              </a:lnSpc>
+              <a:spcBef>
+                <a:spcPts val="0"/>
+              </a:spcBef>
+              <a:spcAft>
+                <a:spcPts val="800"/>
+              </a:spcAft>
+            </a:pPr>
+            <a:r>
+              <a:rPr sz="1150" b="1">
+                <a:solidFill>
+                  <a:srgbClr val="29B5E8"/>
+                </a:solidFill>
+                <a:latin typeface="PingFang SC"/>
+                <a:ea typeface="PingFang SC"/>
+              </a:rPr>
+              <a:t>▪ </a:t>
+            </a:r>
+            <a:r>
+              <a:rPr sz="1150" b="1">
+                <a:solidFill>
+                  <a:srgbClr val="1A1A1A"/>
+                </a:solidFill>
+                <a:latin typeface="PingFang SC"/>
+                <a:ea typeface="PingFang SC"/>
+              </a:rPr>
+              <a:t>Claude 驱动 Snowflake Intelligence（智能分析）</a:t>
+            </a:r>
+          </a:p>
+          <a:p>
+            <a:pPr algn="l">
+              <a:lnSpc>
+                <a:spcPct val="108000"/>
+              </a:lnSpc>
+              <a:spcBef>
+                <a:spcPts val="0"/>
+              </a:spcBef>
+              <a:spcAft>
+                <a:spcPts val="800"/>
+              </a:spcAft>
+            </a:pPr>
+            <a:r>
+              <a:rPr sz="1150" b="1">
+                <a:solidFill>
+                  <a:srgbClr val="29B5E8"/>
+                </a:solidFill>
+                <a:latin typeface="PingFang SC"/>
+                <a:ea typeface="PingFang SC"/>
+              </a:rPr>
+              <a:t>▪ </a:t>
+            </a:r>
+            <a:r>
+              <a:rPr sz="1150" b="0">
+                <a:solidFill>
+                  <a:srgbClr val="5F5F5F"/>
+                </a:solidFill>
+                <a:latin typeface="PingFang SC"/>
+                <a:ea typeface="PingFang SC"/>
+              </a:rPr>
+              <a:t>上架 Claude Marketplace，面向安全的开发工作流</a:t>
+            </a:r>
+          </a:p>
+          <a:p>
+            <a:pPr algn="l">
+              <a:lnSpc>
+                <a:spcPct val="108000"/>
+              </a:lnSpc>
+              <a:spcBef>
+                <a:spcPts val="0"/>
+              </a:spcBef>
+              <a:spcAft>
+                <a:spcPts val="800"/>
+              </a:spcAft>
+            </a:pPr>
+            <a:r>
+              <a:rPr sz="1150" b="1">
+                <a:solidFill>
+                  <a:srgbClr val="29B5E8"/>
+                </a:solidFill>
+                <a:latin typeface="PingFang SC"/>
+                <a:ea typeface="PingFang SC"/>
+              </a:rPr>
+              <a:t>▪ </a:t>
+            </a:r>
+            <a:r>
+              <a:rPr sz="1150" b="0">
+                <a:solidFill>
+                  <a:srgbClr val="5F5F5F"/>
+                </a:solidFill>
+                <a:latin typeface="PingFang SC"/>
+                <a:ea typeface="PingFang SC"/>
+              </a:rPr>
+              <a:t>跨 Bedrock / Vertex AI / Azure 三大云均可调用</a:t>
+            </a:r>
+          </a:p>
+          <a:p>
+            <a:pPr algn="l">
+              <a:lnSpc>
+                <a:spcPct val="108000"/>
+              </a:lnSpc>
+              <a:spcBef>
+                <a:spcPts val="0"/>
+              </a:spcBef>
+              <a:spcAft>
+                <a:spcPts val="800"/>
+              </a:spcAft>
+            </a:pPr>
+            <a:r>
+              <a:rPr sz="1150" b="1">
+                <a:solidFill>
+                  <a:srgbClr val="29B5E8"/>
+                </a:solidFill>
+                <a:latin typeface="PingFang SC"/>
+                <a:ea typeface="PingFang SC"/>
+              </a:rPr>
+              <a:t>▪ </a:t>
+            </a:r>
+            <a:r>
+              <a:rPr sz="1150" b="0">
+                <a:solidFill>
+                  <a:srgbClr val="5F5F5F"/>
+                </a:solidFill>
+                <a:latin typeface="PingFang SC"/>
+                <a:ea typeface="PingFang SC"/>
+              </a:rPr>
+              <a:t>围绕「企业生产级工作负载」深度协同</a:t>
+            </a:r>
+          </a:p>
+        </p:txBody>
+      </p:sp>
+      <p:sp>
+        <p:nvSpPr>
+          <p:cNvPr id="19" name="Rectangle 18"/>
+          <p:cNvSpPr/>
+          <p:nvPr/>
+        </p:nvSpPr>
+        <p:spPr>
+          <a:xfrm>
+            <a:off x="3840480" y="3310128"/>
+            <a:ext cx="3840480" cy="2039112"/>
+          </a:xfrm>
+          <a:prstGeom prst="rect">
+            <a:avLst/>
+          </a:prstGeom>
+          <a:solidFill>
+            <a:srgbClr val="FFFFFF"/>
+          </a:solidFill>
+          <a:ln w="12700">
+            <a:solidFill>
+              <a:srgbClr val="E3DDD3"/>
+            </a:solidFill>
+          </a:ln>
+          <a:effectLst/>
+        </p:spPr>
+        <p:style>
+          <a:lnRef idx="1">
+            <a:schemeClr val="accent1"/>
+          </a:lnRef>
+          <a:fillRef idx="3">
+            <a:schemeClr val="accent1"/>
+          </a:fillRef>
+          <a:effectRef idx="2">
+            <a:schemeClr val="accent1"/>
+          </a:effectRef>
+          <a:fontRef idx="minor">
+            <a:schemeClr val="lt1"/>
+          </a:fontRef>
+        </p:style>
+        <p:txBody>
+          <a:bodyPr rtlCol="0" anchor="ctr"/>
+          <a:lstStyle/>
+          <a:p>
+            <a:pPr algn="ctr"/>
+          </a:p>
+        </p:txBody>
+      </p:sp>
+      <p:sp>
+        <p:nvSpPr>
+          <p:cNvPr id="20" name="Rectangle 19"/>
+          <p:cNvSpPr/>
+          <p:nvPr/>
+        </p:nvSpPr>
+        <p:spPr>
+          <a:xfrm>
+            <a:off x="3840480" y="3310128"/>
+            <a:ext cx="91440" cy="2039112"/>
+          </a:xfrm>
+          <a:prstGeom prst="rect">
+            <a:avLst/>
+          </a:prstGeom>
+          <a:solidFill>
+            <a:srgbClr val="29B5E8"/>
+          </a:solidFill>
+          <a:ln>
+            <a:noFill/>
+          </a:ln>
+          <a:effectLst/>
+        </p:spPr>
+        <p:style>
+          <a:lnRef idx="1">
+            <a:schemeClr val="accent1"/>
+          </a:lnRef>
+          <a:fillRef idx="3">
+            <a:schemeClr val="accent1"/>
+          </a:fillRef>
+          <a:effectRef idx="2">
+            <a:schemeClr val="accent1"/>
+          </a:effectRef>
+          <a:fontRef idx="minor">
+            <a:schemeClr val="lt1"/>
+          </a:fontRef>
+        </p:style>
+        <p:txBody>
+          <a:bodyPr rtlCol="0" anchor="ctr"/>
+          <a:lstStyle/>
+          <a:p>
+            <a:pPr algn="ctr"/>
+          </a:p>
+        </p:txBody>
+      </p:sp>
+      <p:sp>
+        <p:nvSpPr>
+          <p:cNvPr id="21" name="TextBox 20"/>
+          <p:cNvSpPr txBox="1"/>
+          <p:nvPr/>
+        </p:nvSpPr>
+        <p:spPr>
+          <a:xfrm>
+            <a:off x="4078224" y="3419856"/>
+            <a:ext cx="3474720" cy="365760"/>
+          </a:xfrm>
+          <a:prstGeom prst="rect">
+            <a:avLst/>
+          </a:prstGeom>
+          <a:noFill/>
+        </p:spPr>
+        <p:txBody>
+          <a:bodyPr wrap="square" anchor="t" lIns="25400" rIns="25400" tIns="25400" bIns="25400">
+            <a:spAutoFit/>
+          </a:bodyPr>
+          <a:lstStyle/>
+          <a:p>
+            <a:pPr algn="l">
+              <a:spcBef>
+                <a:spcPts val="0"/>
+              </a:spcBef>
+              <a:spcAft>
+                <a:spcPts val="200"/>
+              </a:spcAft>
+            </a:pPr>
+            <a:r>
+              <a:rPr sz="1400" b="1">
+                <a:solidFill>
+                  <a:srgbClr val="29B5E8"/>
+                </a:solidFill>
+                <a:latin typeface="PingFang SC"/>
+                <a:ea typeface="PingFang SC"/>
+              </a:rPr>
+              <a:t>② 战略价值</a:t>
+            </a:r>
+          </a:p>
+        </p:txBody>
+      </p:sp>
+      <p:sp>
+        <p:nvSpPr>
+          <p:cNvPr id="22" name="TextBox 21"/>
+          <p:cNvSpPr txBox="1"/>
+          <p:nvPr/>
+        </p:nvSpPr>
+        <p:spPr>
+          <a:xfrm>
+            <a:off x="4096512" y="3767328"/>
+            <a:ext cx="3383280" cy="2743200"/>
+          </a:xfrm>
+          <a:prstGeom prst="rect">
+            <a:avLst/>
+          </a:prstGeom>
+          <a:noFill/>
+        </p:spPr>
+        <p:txBody>
+          <a:bodyPr wrap="square" anchor="t" lIns="25400" rIns="25400" tIns="25400" bIns="25400">
+            <a:spAutoFit/>
+          </a:bodyPr>
+          <a:lstStyle/>
+          <a:p>
+            <a:pPr algn="l">
+              <a:lnSpc>
+                <a:spcPct val="108000"/>
+              </a:lnSpc>
+              <a:spcBef>
+                <a:spcPts val="0"/>
+              </a:spcBef>
+              <a:spcAft>
+                <a:spcPts val="800"/>
+              </a:spcAft>
+            </a:pPr>
+            <a:r>
+              <a:rPr sz="1100" b="1">
+                <a:solidFill>
+                  <a:srgbClr val="29B5E8"/>
+                </a:solidFill>
+                <a:latin typeface="PingFang SC"/>
+                <a:ea typeface="PingFang SC"/>
+              </a:rPr>
+              <a:t>▪ </a:t>
+            </a:r>
+            <a:r>
+              <a:rPr sz="1100" b="1">
+                <a:solidFill>
+                  <a:srgbClr val="1A1A1A"/>
+                </a:solidFill>
+                <a:latin typeface="PingFang SC"/>
+                <a:ea typeface="PingFang SC"/>
+              </a:rPr>
+              <a:t>主题即卖点：Governed AI —— 直击企业合规与可治理诉求</a:t>
+            </a:r>
+          </a:p>
+          <a:p>
+            <a:pPr algn="l">
+              <a:lnSpc>
+                <a:spcPct val="108000"/>
+              </a:lnSpc>
+              <a:spcBef>
+                <a:spcPts val="0"/>
+              </a:spcBef>
+              <a:spcAft>
+                <a:spcPts val="800"/>
+              </a:spcAft>
+            </a:pPr>
+            <a:r>
+              <a:rPr sz="1100" b="1">
+                <a:solidFill>
+                  <a:srgbClr val="29B5E8"/>
+                </a:solidFill>
+                <a:latin typeface="PingFang SC"/>
+                <a:ea typeface="PingFang SC"/>
+              </a:rPr>
+              <a:t>▪ </a:t>
+            </a:r>
+            <a:r>
+              <a:rPr sz="1100" b="0">
+                <a:solidFill>
+                  <a:srgbClr val="5F5F5F"/>
+                </a:solidFill>
+                <a:latin typeface="PingFang SC"/>
+                <a:ea typeface="PingFang SC"/>
+              </a:rPr>
+              <a:t>联合 GTM：面向「全球最大企业」批量部署 AI Agent</a:t>
+            </a:r>
+          </a:p>
+          <a:p>
+            <a:pPr algn="l">
+              <a:lnSpc>
+                <a:spcPct val="108000"/>
+              </a:lnSpc>
+              <a:spcBef>
+                <a:spcPts val="0"/>
+              </a:spcBef>
+              <a:spcAft>
+                <a:spcPts val="800"/>
+              </a:spcAft>
+            </a:pPr>
+            <a:r>
+              <a:rPr sz="1100" b="1">
+                <a:solidFill>
+                  <a:srgbClr val="29B5E8"/>
+                </a:solidFill>
+                <a:latin typeface="PingFang SC"/>
+                <a:ea typeface="PingFang SC"/>
+              </a:rPr>
+              <a:t>▪ </a:t>
+            </a:r>
+            <a:r>
+              <a:rPr sz="1100" b="0">
+                <a:solidFill>
+                  <a:srgbClr val="5F5F5F"/>
+                </a:solidFill>
+                <a:latin typeface="PingFang SC"/>
+                <a:ea typeface="PingFang SC"/>
+              </a:rPr>
+              <a:t>12,600+ 客户即时可达，分发杠杆极高</a:t>
+            </a:r>
+          </a:p>
+          <a:p>
+            <a:pPr algn="l">
+              <a:lnSpc>
+                <a:spcPct val="108000"/>
+              </a:lnSpc>
+              <a:spcBef>
+                <a:spcPts val="0"/>
+              </a:spcBef>
+              <a:spcAft>
+                <a:spcPts val="800"/>
+              </a:spcAft>
+            </a:pPr>
+            <a:r>
+              <a:rPr sz="1100" b="1">
+                <a:solidFill>
+                  <a:srgbClr val="29B5E8"/>
+                </a:solidFill>
+                <a:latin typeface="PingFang SC"/>
+                <a:ea typeface="PingFang SC"/>
+              </a:rPr>
+              <a:t>▪ </a:t>
+            </a:r>
+            <a:r>
+              <a:rPr sz="1100" b="0">
+                <a:solidFill>
+                  <a:srgbClr val="5F5F5F"/>
+                </a:solidFill>
+                <a:latin typeface="PingFang SC"/>
+                <a:ea typeface="PingFang SC"/>
+              </a:rPr>
+              <a:t>与 Databricks 同时供货 = 通吃数据平台赛道算力</a:t>
+            </a:r>
+          </a:p>
+        </p:txBody>
+      </p:sp>
+      <p:sp>
+        <p:nvSpPr>
+          <p:cNvPr id="23" name="Rectangle 22"/>
+          <p:cNvSpPr/>
+          <p:nvPr/>
+        </p:nvSpPr>
+        <p:spPr>
+          <a:xfrm>
+            <a:off x="7845552" y="3310128"/>
+            <a:ext cx="3840480" cy="2039112"/>
+          </a:xfrm>
+          <a:prstGeom prst="rect">
+            <a:avLst/>
+          </a:prstGeom>
+          <a:solidFill>
+            <a:srgbClr val="FFFFFF"/>
+          </a:solidFill>
+          <a:ln w="12700">
+            <a:solidFill>
+              <a:srgbClr val="E3DDD3"/>
+            </a:solidFill>
+          </a:ln>
+          <a:effectLst/>
+        </p:spPr>
+        <p:style>
+          <a:lnRef idx="1">
+            <a:schemeClr val="accent1"/>
+          </a:lnRef>
+          <a:fillRef idx="3">
+            <a:schemeClr val="accent1"/>
+          </a:fillRef>
+          <a:effectRef idx="2">
+            <a:schemeClr val="accent1"/>
+          </a:effectRef>
+          <a:fontRef idx="minor">
+            <a:schemeClr val="lt1"/>
+          </a:fontRef>
+        </p:style>
+        <p:txBody>
+          <a:bodyPr rtlCol="0" anchor="ctr"/>
+          <a:lstStyle/>
+          <a:p>
+            <a:pPr algn="ctr"/>
+          </a:p>
+        </p:txBody>
+      </p:sp>
+      <p:sp>
+        <p:nvSpPr>
+          <p:cNvPr id="24" name="Rectangle 23"/>
+          <p:cNvSpPr/>
+          <p:nvPr/>
+        </p:nvSpPr>
+        <p:spPr>
+          <a:xfrm>
+            <a:off x="7845552" y="3310128"/>
+            <a:ext cx="91440" cy="2039112"/>
+          </a:xfrm>
+          <a:prstGeom prst="rect">
+            <a:avLst/>
+          </a:prstGeom>
+          <a:solidFill>
+            <a:srgbClr val="29B5E8"/>
+          </a:solidFill>
+          <a:ln>
+            <a:noFill/>
+          </a:ln>
+          <a:effectLst/>
+        </p:spPr>
+        <p:style>
+          <a:lnRef idx="1">
+            <a:schemeClr val="accent1"/>
+          </a:lnRef>
+          <a:fillRef idx="3">
+            <a:schemeClr val="accent1"/>
+          </a:fillRef>
+          <a:effectRef idx="2">
+            <a:schemeClr val="accent1"/>
+          </a:effectRef>
+          <a:fontRef idx="minor">
+            <a:schemeClr val="lt1"/>
+          </a:fontRef>
+        </p:style>
+        <p:txBody>
+          <a:bodyPr rtlCol="0" anchor="ctr"/>
+          <a:lstStyle/>
+          <a:p>
+            <a:pPr algn="ctr"/>
+          </a:p>
+        </p:txBody>
+      </p:sp>
+      <p:sp>
+        <p:nvSpPr>
+          <p:cNvPr id="25" name="TextBox 24"/>
+          <p:cNvSpPr txBox="1"/>
+          <p:nvPr/>
+        </p:nvSpPr>
+        <p:spPr>
+          <a:xfrm>
+            <a:off x="8083296" y="3419856"/>
+            <a:ext cx="3474720" cy="365760"/>
+          </a:xfrm>
+          <a:prstGeom prst="rect">
+            <a:avLst/>
+          </a:prstGeom>
+          <a:noFill/>
+        </p:spPr>
+        <p:txBody>
+          <a:bodyPr wrap="square" anchor="t" lIns="25400" rIns="25400" tIns="25400" bIns="25400">
+            <a:spAutoFit/>
+          </a:bodyPr>
+          <a:lstStyle/>
+          <a:p>
+            <a:pPr algn="l">
+              <a:spcBef>
+                <a:spcPts val="0"/>
+              </a:spcBef>
+              <a:spcAft>
+                <a:spcPts val="200"/>
+              </a:spcAft>
+            </a:pPr>
+            <a:r>
+              <a:rPr sz="1400" b="1">
+                <a:solidFill>
+                  <a:srgbClr val="29B5E8"/>
+                </a:solidFill>
+                <a:latin typeface="PingFang SC"/>
+                <a:ea typeface="PingFang SC"/>
+              </a:rPr>
+              <a:t>③ 客户与案例</a:t>
+            </a:r>
+          </a:p>
+        </p:txBody>
+      </p:sp>
+      <p:sp>
+        <p:nvSpPr>
+          <p:cNvPr id="26" name="TextBox 25"/>
+          <p:cNvSpPr txBox="1"/>
+          <p:nvPr/>
+        </p:nvSpPr>
+        <p:spPr>
+          <a:xfrm>
+            <a:off x="8101584" y="3767328"/>
+            <a:ext cx="3383280" cy="2743200"/>
+          </a:xfrm>
+          <a:prstGeom prst="rect">
+            <a:avLst/>
+          </a:prstGeom>
+          <a:noFill/>
+        </p:spPr>
+        <p:txBody>
+          <a:bodyPr wrap="square" anchor="t" lIns="25400" rIns="25400" tIns="25400" bIns="25400">
+            <a:spAutoFit/>
+          </a:bodyPr>
+          <a:lstStyle/>
+          <a:p>
+            <a:pPr algn="l">
+              <a:lnSpc>
+                <a:spcPct val="108000"/>
+              </a:lnSpc>
+              <a:spcBef>
+                <a:spcPts val="0"/>
+              </a:spcBef>
+              <a:spcAft>
+                <a:spcPts val="800"/>
+              </a:spcAft>
+            </a:pPr>
+            <a:r>
+              <a:rPr sz="1100" b="1">
+                <a:solidFill>
+                  <a:srgbClr val="29B5E8"/>
+                </a:solidFill>
+                <a:latin typeface="PingFang SC"/>
+                <a:ea typeface="PingFang SC"/>
+              </a:rPr>
+              <a:t>▪ </a:t>
+            </a:r>
+            <a:r>
+              <a:rPr sz="1100" b="1">
+                <a:solidFill>
+                  <a:srgbClr val="1A1A1A"/>
+                </a:solidFill>
+                <a:latin typeface="PingFang SC"/>
+                <a:ea typeface="PingFang SC"/>
+              </a:rPr>
+              <a:t>12,600+ Snowflake 企业客户为即时市场</a:t>
+            </a:r>
+          </a:p>
+          <a:p>
+            <a:pPr algn="l">
+              <a:lnSpc>
+                <a:spcPct val="108000"/>
+              </a:lnSpc>
+              <a:spcBef>
+                <a:spcPts val="0"/>
+              </a:spcBef>
+              <a:spcAft>
+                <a:spcPts val="800"/>
+              </a:spcAft>
+            </a:pPr>
+            <a:r>
+              <a:rPr sz="1100" b="1">
+                <a:solidFill>
+                  <a:srgbClr val="29B5E8"/>
+                </a:solidFill>
+                <a:latin typeface="PingFang SC"/>
+                <a:ea typeface="PingFang SC"/>
+              </a:rPr>
+              <a:t>▪ </a:t>
+            </a:r>
+            <a:r>
+              <a:rPr sz="1100" b="0">
+                <a:solidFill>
+                  <a:srgbClr val="5F5F5F"/>
+                </a:solidFill>
+                <a:latin typeface="PingFang SC"/>
+                <a:ea typeface="PingFang SC"/>
+              </a:rPr>
+              <a:t>需求侧：企业对「合规、可治理」AI 的需求快速上升</a:t>
+            </a:r>
+          </a:p>
+          <a:p>
+            <a:pPr algn="l">
+              <a:lnSpc>
+                <a:spcPct val="108000"/>
+              </a:lnSpc>
+              <a:spcBef>
+                <a:spcPts val="0"/>
+              </a:spcBef>
+              <a:spcAft>
+                <a:spcPts val="800"/>
+              </a:spcAft>
+            </a:pPr>
+            <a:r>
+              <a:rPr sz="1100" b="1">
+                <a:solidFill>
+                  <a:srgbClr val="29B5E8"/>
+                </a:solidFill>
+                <a:latin typeface="PingFang SC"/>
+                <a:ea typeface="PingFang SC"/>
+              </a:rPr>
+              <a:t>▪ </a:t>
+            </a:r>
+            <a:r>
+              <a:rPr sz="1100" b="0">
+                <a:solidFill>
+                  <a:srgbClr val="5F5F5F"/>
+                </a:solidFill>
+                <a:latin typeface="PingFang SC"/>
+                <a:ea typeface="PingFang SC"/>
+              </a:rPr>
+              <a:t>金融、医疗等数据敏感行业的生产化落地</a:t>
+            </a:r>
+          </a:p>
+          <a:p>
+            <a:pPr algn="l">
+              <a:lnSpc>
+                <a:spcPct val="108000"/>
+              </a:lnSpc>
+              <a:spcBef>
+                <a:spcPts val="0"/>
+              </a:spcBef>
+              <a:spcAft>
+                <a:spcPts val="800"/>
+              </a:spcAft>
+            </a:pPr>
+            <a:r>
+              <a:rPr sz="1100" b="1">
+                <a:solidFill>
+                  <a:srgbClr val="29B5E8"/>
+                </a:solidFill>
+                <a:latin typeface="PingFang SC"/>
+                <a:ea typeface="PingFang SC"/>
+              </a:rPr>
+              <a:t>▪ </a:t>
+            </a:r>
+            <a:r>
+              <a:rPr sz="1100" b="0">
+                <a:solidFill>
+                  <a:srgbClr val="5F5F5F"/>
+                </a:solidFill>
+                <a:latin typeface="PingFang SC"/>
+                <a:ea typeface="PingFang SC"/>
+              </a:rPr>
+              <a:t>Cortex 生态内的 Agent / 代码 / 分析场景</a:t>
+            </a:r>
+          </a:p>
+        </p:txBody>
+      </p:sp>
+      <p:sp>
+        <p:nvSpPr>
+          <p:cNvPr id="27" name="Rectangle 26"/>
+          <p:cNvSpPr/>
+          <p:nvPr/>
+        </p:nvSpPr>
+        <p:spPr>
+          <a:xfrm>
+            <a:off x="502920" y="5504688"/>
+            <a:ext cx="11183112" cy="896112"/>
+          </a:xfrm>
+          <a:prstGeom prst="rect">
+            <a:avLst/>
+          </a:prstGeom>
+          <a:solidFill>
+            <a:srgbClr val="2B2B2B"/>
+          </a:solidFill>
+          <a:ln>
+            <a:noFill/>
+          </a:ln>
+          <a:effectLst/>
+        </p:spPr>
+        <p:style>
+          <a:lnRef idx="1">
+            <a:schemeClr val="accent1"/>
+          </a:lnRef>
+          <a:fillRef idx="3">
+            <a:schemeClr val="accent1"/>
+          </a:fillRef>
+          <a:effectRef idx="2">
+            <a:schemeClr val="accent1"/>
+          </a:effectRef>
+          <a:fontRef idx="minor">
+            <a:schemeClr val="lt1"/>
+          </a:fontRef>
+        </p:style>
+        <p:txBody>
+          <a:bodyPr rtlCol="0" anchor="ctr"/>
+          <a:lstStyle/>
+          <a:p>
+            <a:pPr algn="ctr"/>
+          </a:p>
+        </p:txBody>
+      </p:sp>
+      <p:sp>
+        <p:nvSpPr>
+          <p:cNvPr id="28" name="Rectangle 27"/>
+          <p:cNvSpPr/>
+          <p:nvPr/>
+        </p:nvSpPr>
+        <p:spPr>
+          <a:xfrm>
+            <a:off x="502920" y="5504688"/>
+            <a:ext cx="109728" cy="896112"/>
+          </a:xfrm>
+          <a:prstGeom prst="rect">
+            <a:avLst/>
+          </a:prstGeom>
+          <a:solidFill>
+            <a:srgbClr val="29B5E8"/>
+          </a:solidFill>
+          <a:ln>
+            <a:noFill/>
+          </a:ln>
+          <a:effectLst/>
+        </p:spPr>
+        <p:style>
+          <a:lnRef idx="1">
+            <a:schemeClr val="accent1"/>
+          </a:lnRef>
+          <a:fillRef idx="3">
+            <a:schemeClr val="accent1"/>
+          </a:fillRef>
+          <a:effectRef idx="2">
+            <a:schemeClr val="accent1"/>
+          </a:effectRef>
+          <a:fontRef idx="minor">
+            <a:schemeClr val="lt1"/>
+          </a:fontRef>
+        </p:style>
+        <p:txBody>
+          <a:bodyPr rtlCol="0" anchor="ctr"/>
+          <a:lstStyle/>
+          <a:p>
+            <a:pPr algn="ctr"/>
+          </a:p>
+        </p:txBody>
+      </p:sp>
+      <p:sp>
+        <p:nvSpPr>
+          <p:cNvPr id="29" name="TextBox 28"/>
+          <p:cNvSpPr txBox="1"/>
+          <p:nvPr/>
+        </p:nvSpPr>
+        <p:spPr>
+          <a:xfrm>
+            <a:off x="804672" y="5614416"/>
+            <a:ext cx="10698480" cy="713232"/>
+          </a:xfrm>
+          <a:prstGeom prst="rect">
+            <a:avLst/>
+          </a:prstGeom>
+          <a:noFill/>
+        </p:spPr>
+        <p:txBody>
+          <a:bodyPr wrap="square" anchor="ctr" lIns="25400" rIns="25400" tIns="25400" bIns="25400">
+            <a:spAutoFit/>
+          </a:bodyPr>
+          <a:lstStyle/>
+          <a:p>
+            <a:pPr algn="l">
+              <a:lnSpc>
+                <a:spcPct val="108000"/>
+              </a:lnSpc>
+              <a:spcBef>
+                <a:spcPts val="0"/>
+              </a:spcBef>
+              <a:spcAft>
+                <a:spcPts val="200"/>
+              </a:spcAft>
+            </a:pPr>
+            <a:r>
+              <a:rPr sz="1250" b="1">
+                <a:solidFill>
+                  <a:srgbClr val="D97757"/>
+                </a:solidFill>
+                <a:latin typeface="PingFang SC"/>
+                <a:ea typeface="PingFang SC"/>
+              </a:rPr>
+              <a:t>战略本质：</a:t>
+            </a:r>
+            <a:r>
+              <a:rPr sz="1200" b="0">
+                <a:solidFill>
+                  <a:srgbClr val="FFFFFF"/>
+                </a:solidFill>
+                <a:latin typeface="PingFang SC"/>
+                <a:ea typeface="PingFang SC"/>
+              </a:rPr>
+              <a:t>在数据平台战争中两边都供货 —— 无论企业选 Snowflake 还是 Databricks，智能层都是 Claude。Anthropic 以「中立军火商」之姿吃下整条赛道。</a:t>
+            </a:r>
+          </a:p>
+        </p:txBody>
+      </p:sp>
+      <p:sp>
+        <p:nvSpPr>
+          <p:cNvPr id="30" name="TextBox 29"/>
+          <p:cNvSpPr txBox="1"/>
+          <p:nvPr/>
+        </p:nvSpPr>
+        <p:spPr>
+          <a:xfrm>
+            <a:off x="502920" y="6528816"/>
+            <a:ext cx="11155680" cy="274320"/>
+          </a:xfrm>
+          <a:prstGeom prst="rect">
+            <a:avLst/>
+          </a:prstGeom>
+          <a:noFill/>
+        </p:spPr>
+        <p:txBody>
+          <a:bodyPr wrap="square" anchor="t" lIns="25400" rIns="25400" tIns="25400" bIns="25400">
+            <a:spAutoFit/>
+          </a:bodyPr>
+          <a:lstStyle/>
+          <a:p>
+            <a:pPr algn="l">
+              <a:spcBef>
+                <a:spcPts val="0"/>
+              </a:spcBef>
+              <a:spcAft>
+                <a:spcPts val="200"/>
+              </a:spcAft>
+            </a:pPr>
+            <a:r>
+              <a:rPr sz="800" b="0">
+                <a:solidFill>
+                  <a:srgbClr val="5F5F5F"/>
+                </a:solidFill>
+                <a:latin typeface="PingFang SC"/>
+                <a:ea typeface="PingFang SC"/>
+              </a:rPr>
+              <a:t>资料来源：Anthropic / Snowflake 官方新闻稿、TechTarget、BigDATAwire（2025–2026）；金额为公开披露口径。</a:t>
+            </a:r>
+          </a:p>
+        </p:txBody>
+      </p:sp>
+    </p:spTree>
+  </p:cSld>
+  <p:clrMapOvr>
+    <a:masterClrMapping/>
+  </p:clrMapOvr>
+</p:sld>
+</file>
+
+<file path=ppt/slides/slide4.xml><?xml version="1.0" encoding="utf-8"?>
+<p:sld xmlns:a="http://schemas.openxmlformats.org/drawingml/2006/main" xmlns:p="http://schemas.openxmlformats.org/presentationml/2006/main" xmlns:r="http://schemas.openxmlformats.org/officeDocument/2006/relationships">
+  <p:cSld>
+    <p:spTree>
+      <p:nvGrpSpPr>
+        <p:cNvPr id="1" name=""/>
+        <p:cNvGrpSpPr/>
+        <p:nvPr/>
+      </p:nvGrpSpPr>
+      <p:grpSpPr/>
+      <p:sp>
+        <p:nvSpPr>
+          <p:cNvPr id="2" name="Rectangle 1"/>
+          <p:cNvSpPr/>
+          <p:nvPr/>
+        </p:nvSpPr>
+        <p:spPr>
+          <a:xfrm>
+            <a:off x="0" y="0"/>
+            <a:ext cx="12191695" cy="6858000"/>
+          </a:xfrm>
+          <a:prstGeom prst="rect">
+            <a:avLst/>
+          </a:prstGeom>
+          <a:solidFill>
+            <a:srgbClr val="F7F4EF"/>
+          </a:solidFill>
+          <a:ln>
+            <a:noFill/>
+          </a:ln>
+          <a:effectLst/>
+        </p:spPr>
+        <p:style>
+          <a:lnRef idx="1">
+            <a:schemeClr val="accent1"/>
+          </a:lnRef>
+          <a:fillRef idx="3">
+            <a:schemeClr val="accent1"/>
+          </a:fillRef>
+          <a:effectRef idx="2">
+            <a:schemeClr val="accent1"/>
+          </a:effectRef>
+          <a:fontRef idx="minor">
+            <a:schemeClr val="lt1"/>
+          </a:fontRef>
+        </p:style>
+        <p:txBody>
+          <a:bodyPr rtlCol="0" anchor="ctr"/>
+          <a:lstStyle/>
+          <a:p>
+            <a:pPr algn="ctr"/>
+          </a:p>
+        </p:txBody>
+      </p:sp>
+      <p:sp>
+        <p:nvSpPr>
+          <p:cNvPr id="3" name="Rectangle 2"/>
+          <p:cNvSpPr/>
+          <p:nvPr/>
+        </p:nvSpPr>
+        <p:spPr>
+          <a:xfrm>
+            <a:off x="0" y="0"/>
+            <a:ext cx="12191695" cy="164592"/>
+          </a:xfrm>
+          <a:prstGeom prst="rect">
+            <a:avLst/>
+          </a:prstGeom>
+          <a:solidFill>
+            <a:srgbClr val="D97757"/>
+          </a:solidFill>
+          <a:ln>
+            <a:noFill/>
+          </a:ln>
+          <a:effectLst/>
+        </p:spPr>
+        <p:style>
+          <a:lnRef idx="1">
+            <a:schemeClr val="accent1"/>
+          </a:lnRef>
+          <a:fillRef idx="3">
+            <a:schemeClr val="accent1"/>
+          </a:fillRef>
+          <a:effectRef idx="2">
+            <a:schemeClr val="accent1"/>
+          </a:effectRef>
+          <a:fontRef idx="minor">
+            <a:schemeClr val="lt1"/>
+          </a:fontRef>
+        </p:style>
+        <p:txBody>
+          <a:bodyPr rtlCol="0" anchor="ctr"/>
+          <a:lstStyle/>
+          <a:p>
+            <a:pPr algn="ctr"/>
+          </a:p>
+        </p:txBody>
+      </p:sp>
+      <p:sp>
+        <p:nvSpPr>
+          <p:cNvPr id="4" name="TextBox 3"/>
+          <p:cNvSpPr txBox="1"/>
+          <p:nvPr/>
+        </p:nvSpPr>
+        <p:spPr>
+          <a:xfrm>
+            <a:off x="502920" y="292608"/>
+            <a:ext cx="8778240" cy="868680"/>
+          </a:xfrm>
+          <a:prstGeom prst="rect">
+            <a:avLst/>
+          </a:prstGeom>
+          <a:noFill/>
+        </p:spPr>
+        <p:txBody>
+          <a:bodyPr wrap="square" anchor="t" lIns="25400" rIns="25400" tIns="25400" bIns="25400">
+            <a:spAutoFit/>
+          </a:bodyPr>
+          <a:lstStyle/>
+          <a:p>
+            <a:pPr algn="l">
+              <a:spcBef>
+                <a:spcPts val="0"/>
+              </a:spcBef>
+              <a:spcAft>
+                <a:spcPts val="400"/>
+              </a:spcAft>
+            </a:pPr>
+            <a:r>
+              <a:rPr sz="3000" b="1">
+                <a:solidFill>
+                  <a:srgbClr val="1A1A1A"/>
+                </a:solidFill>
+                <a:latin typeface="PingFang SC"/>
+                <a:ea typeface="PingFang SC"/>
+              </a:rPr>
+              <a:t>Anthropic × Salesforce</a:t>
+            </a:r>
+          </a:p>
+          <a:p>
+            <a:pPr algn="l">
+              <a:spcBef>
+                <a:spcPts val="0"/>
+              </a:spcBef>
+              <a:spcAft>
+                <a:spcPts val="400"/>
+              </a:spcAft>
+            </a:pPr>
+            <a:r>
+              <a:rPr sz="1400" b="0">
+                <a:solidFill>
+                  <a:srgbClr val="5F5F5F"/>
+                </a:solidFill>
+                <a:latin typeface="PingFang SC"/>
+                <a:ea typeface="PingFang SC"/>
+              </a:rPr>
+              <a:t>以「信任边界」内置拿下受监管行业 —— Claude 成 Agentforce 首选模型</a:t>
+            </a:r>
+          </a:p>
+        </p:txBody>
+      </p:sp>
+      <p:sp>
+        <p:nvSpPr>
+          <p:cNvPr id="5" name="Rectangle 4"/>
+          <p:cNvSpPr/>
+          <p:nvPr/>
+        </p:nvSpPr>
+        <p:spPr>
+          <a:xfrm>
+            <a:off x="9601200" y="384048"/>
+            <a:ext cx="2103120" cy="502920"/>
+          </a:xfrm>
+          <a:prstGeom prst="rect">
+            <a:avLst/>
+          </a:prstGeom>
+          <a:solidFill>
+            <a:srgbClr val="00A1E0"/>
+          </a:solidFill>
+          <a:ln>
+            <a:noFill/>
+          </a:ln>
+          <a:effectLst/>
+        </p:spPr>
+        <p:style>
+          <a:lnRef idx="1">
+            <a:schemeClr val="accent1"/>
+          </a:lnRef>
+          <a:fillRef idx="3">
+            <a:schemeClr val="accent1"/>
+          </a:fillRef>
+          <a:effectRef idx="2">
+            <a:schemeClr val="accent1"/>
+          </a:effectRef>
+          <a:fontRef idx="minor">
+            <a:schemeClr val="lt1"/>
+          </a:fontRef>
+        </p:style>
+        <p:txBody>
+          <a:bodyPr rtlCol="0" anchor="ctr"/>
+          <a:lstStyle/>
+          <a:p>
+            <a:pPr algn="ctr"/>
+            <a:r>
+              <a:rPr sz="1400" b="1">
+                <a:solidFill>
+                  <a:srgbClr val="FFFFFF"/>
+                </a:solidFill>
+                <a:latin typeface="PingFang SC"/>
+                <a:ea typeface="PingFang SC"/>
+              </a:rPr>
+              <a:t>受监管行业首选</a:t>
+            </a:r>
+          </a:p>
+        </p:txBody>
+      </p:sp>
+      <p:sp>
+        <p:nvSpPr>
+          <p:cNvPr id="6" name="Rectangle 5"/>
+          <p:cNvSpPr/>
+          <p:nvPr/>
+        </p:nvSpPr>
+        <p:spPr>
+          <a:xfrm>
+            <a:off x="502920" y="1325880"/>
+            <a:ext cx="3154680" cy="4023360"/>
+          </a:xfrm>
+          <a:prstGeom prst="rect">
+            <a:avLst/>
+          </a:prstGeom>
+          <a:solidFill>
+            <a:srgbClr val="2B2B2B"/>
+          </a:solidFill>
+          <a:ln>
+            <a:noFill/>
+          </a:ln>
+          <a:effectLst/>
+        </p:spPr>
+        <p:style>
+          <a:lnRef idx="1">
+            <a:schemeClr val="accent1"/>
+          </a:lnRef>
+          <a:fillRef idx="3">
+            <a:schemeClr val="accent1"/>
+          </a:fillRef>
+          <a:effectRef idx="2">
+            <a:schemeClr val="accent1"/>
+          </a:effectRef>
+          <a:fontRef idx="minor">
+            <a:schemeClr val="lt1"/>
+          </a:fontRef>
+        </p:style>
+        <p:txBody>
+          <a:bodyPr rtlCol="0" anchor="ctr"/>
+          <a:lstStyle/>
+          <a:p>
+            <a:pPr algn="ctr"/>
+          </a:p>
+        </p:txBody>
+      </p:sp>
+      <p:sp>
+        <p:nvSpPr>
+          <p:cNvPr id="7" name="Rectangle 6"/>
+          <p:cNvSpPr/>
+          <p:nvPr/>
+        </p:nvSpPr>
+        <p:spPr>
+          <a:xfrm>
+            <a:off x="502920" y="1325880"/>
+            <a:ext cx="3154680" cy="566928"/>
+          </a:xfrm>
+          <a:prstGeom prst="rect">
+            <a:avLst/>
+          </a:prstGeom>
+          <a:solidFill>
+            <a:srgbClr val="00A1E0"/>
+          </a:solidFill>
+          <a:ln>
+            <a:noFill/>
+          </a:ln>
+          <a:effectLst/>
+        </p:spPr>
+        <p:style>
+          <a:lnRef idx="1">
+            <a:schemeClr val="accent1"/>
+          </a:lnRef>
+          <a:fillRef idx="3">
+            <a:schemeClr val="accent1"/>
+          </a:fillRef>
+          <a:effectRef idx="2">
+            <a:schemeClr val="accent1"/>
+          </a:effectRef>
+          <a:fontRef idx="minor">
+            <a:schemeClr val="lt1"/>
+          </a:fontRef>
+        </p:style>
+        <p:txBody>
+          <a:bodyPr rtlCol="0" anchor="ctr"/>
+          <a:lstStyle/>
+          <a:p>
+            <a:pPr algn="ctr"/>
+          </a:p>
+        </p:txBody>
+      </p:sp>
+      <p:sp>
+        <p:nvSpPr>
+          <p:cNvPr id="8" name="TextBox 7"/>
+          <p:cNvSpPr txBox="1"/>
+          <p:nvPr/>
+        </p:nvSpPr>
+        <p:spPr>
+          <a:xfrm>
+            <a:off x="704088" y="1417320"/>
+            <a:ext cx="2788920" cy="457200"/>
+          </a:xfrm>
+          <a:prstGeom prst="rect">
+            <a:avLst/>
+          </a:prstGeom>
+          <a:noFill/>
+        </p:spPr>
+        <p:txBody>
+          <a:bodyPr wrap="square" anchor="ctr" lIns="25400" rIns="25400" tIns="25400" bIns="25400">
+            <a:spAutoFit/>
+          </a:bodyPr>
+          <a:lstStyle/>
+          <a:p>
+            <a:pPr algn="l">
+              <a:spcBef>
+                <a:spcPts val="0"/>
+              </a:spcBef>
+              <a:spcAft>
+                <a:spcPts val="200"/>
+              </a:spcAft>
+            </a:pPr>
+            <a:r>
+              <a:rPr sz="1300" b="1">
+                <a:solidFill>
+                  <a:srgbClr val="FFFFFF"/>
+                </a:solidFill>
+                <a:latin typeface="PingFang SC"/>
+                <a:ea typeface="PingFang SC"/>
+              </a:rPr>
+              <a:t>合作快照 · Salesforce</a:t>
+            </a:r>
+          </a:p>
+        </p:txBody>
+      </p:sp>
+      <p:sp>
+        <p:nvSpPr>
+          <p:cNvPr id="9" name="TextBox 8"/>
+          <p:cNvSpPr txBox="1"/>
+          <p:nvPr/>
+        </p:nvSpPr>
+        <p:spPr>
+          <a:xfrm>
+            <a:off x="722376" y="2075688"/>
+            <a:ext cx="2734056" cy="566928"/>
+          </a:xfrm>
+          <a:prstGeom prst="rect">
+            <a:avLst/>
+          </a:prstGeom>
+          <a:noFill/>
+        </p:spPr>
+        <p:txBody>
+          <a:bodyPr wrap="square" anchor="t" lIns="25400" rIns="25400" tIns="25400" bIns="25400">
+            <a:spAutoFit/>
+          </a:bodyPr>
+          <a:lstStyle/>
+          <a:p>
+            <a:pPr algn="l">
+              <a:lnSpc>
+                <a:spcPct val="100000"/>
+              </a:lnSpc>
+              <a:spcBef>
+                <a:spcPts val="0"/>
+              </a:spcBef>
+              <a:spcAft>
+                <a:spcPts val="100"/>
+              </a:spcAft>
+            </a:pPr>
+            <a:r>
+              <a:rPr sz="1000" b="0">
+                <a:solidFill>
+                  <a:srgbClr val="B7B1A8"/>
+                </a:solidFill>
+                <a:latin typeface="PingFang SC"/>
+                <a:ea typeface="PingFang SC"/>
+              </a:rPr>
+              <a:t>协议类型</a:t>
+            </a:r>
+          </a:p>
+          <a:p>
+            <a:pPr algn="l">
+              <a:lnSpc>
+                <a:spcPct val="100000"/>
+              </a:lnSpc>
+              <a:spcBef>
+                <a:spcPts val="0"/>
+              </a:spcBef>
+              <a:spcAft>
+                <a:spcPts val="100"/>
+              </a:spcAft>
+            </a:pPr>
+            <a:r>
+              <a:rPr sz="1300" b="1">
+                <a:solidFill>
+                  <a:srgbClr val="FFFFFF"/>
+                </a:solidFill>
+                <a:latin typeface="PingFang SC"/>
+                <a:ea typeface="PingFang SC"/>
+              </a:rPr>
+              <a:t>扩展战略合作</a:t>
+            </a:r>
+          </a:p>
+        </p:txBody>
+      </p:sp>
+      <p:sp>
+        <p:nvSpPr>
+          <p:cNvPr id="10" name="TextBox 9"/>
+          <p:cNvSpPr txBox="1"/>
+          <p:nvPr/>
+        </p:nvSpPr>
+        <p:spPr>
+          <a:xfrm>
+            <a:off x="722376" y="2619756"/>
+            <a:ext cx="2734056" cy="566928"/>
+          </a:xfrm>
+          <a:prstGeom prst="rect">
+            <a:avLst/>
+          </a:prstGeom>
+          <a:noFill/>
+        </p:spPr>
+        <p:txBody>
+          <a:bodyPr wrap="square" anchor="t" lIns="25400" rIns="25400" tIns="25400" bIns="25400">
+            <a:spAutoFit/>
+          </a:bodyPr>
+          <a:lstStyle/>
+          <a:p>
+            <a:pPr algn="l">
+              <a:lnSpc>
+                <a:spcPct val="100000"/>
+              </a:lnSpc>
+              <a:spcBef>
+                <a:spcPts val="0"/>
+              </a:spcBef>
+              <a:spcAft>
+                <a:spcPts val="100"/>
+              </a:spcAft>
+            </a:pPr>
+            <a:r>
+              <a:rPr sz="1000" b="0">
+                <a:solidFill>
+                  <a:srgbClr val="B7B1A8"/>
+                </a:solidFill>
+                <a:latin typeface="PingFang SC"/>
+                <a:ea typeface="PingFang SC"/>
+              </a:rPr>
+              <a:t>公布时间</a:t>
+            </a:r>
+          </a:p>
+          <a:p>
+            <a:pPr algn="l">
+              <a:lnSpc>
+                <a:spcPct val="100000"/>
+              </a:lnSpc>
+              <a:spcBef>
+                <a:spcPts val="0"/>
+              </a:spcBef>
+              <a:spcAft>
+                <a:spcPts val="100"/>
+              </a:spcAft>
+            </a:pPr>
+            <a:r>
+              <a:rPr sz="1300" b="1">
+                <a:solidFill>
+                  <a:srgbClr val="FFFFFF"/>
+                </a:solidFill>
+                <a:latin typeface="PingFang SC"/>
+                <a:ea typeface="PingFang SC"/>
+              </a:rPr>
+              <a:t>2025.10.14</a:t>
+            </a:r>
+          </a:p>
+        </p:txBody>
+      </p:sp>
+      <p:sp>
+        <p:nvSpPr>
+          <p:cNvPr id="11" name="TextBox 10"/>
+          <p:cNvSpPr txBox="1"/>
+          <p:nvPr/>
+        </p:nvSpPr>
+        <p:spPr>
+          <a:xfrm>
+            <a:off x="722376" y="3163824"/>
+            <a:ext cx="2734056" cy="566928"/>
+          </a:xfrm>
+          <a:prstGeom prst="rect">
+            <a:avLst/>
+          </a:prstGeom>
+          <a:noFill/>
+        </p:spPr>
+        <p:txBody>
+          <a:bodyPr wrap="square" anchor="t" lIns="25400" rIns="25400" tIns="25400" bIns="25400">
+            <a:spAutoFit/>
+          </a:bodyPr>
+          <a:lstStyle/>
+          <a:p>
+            <a:pPr algn="l">
+              <a:lnSpc>
+                <a:spcPct val="100000"/>
+              </a:lnSpc>
+              <a:spcBef>
+                <a:spcPts val="0"/>
+              </a:spcBef>
+              <a:spcAft>
+                <a:spcPts val="100"/>
+              </a:spcAft>
+            </a:pPr>
+            <a:r>
+              <a:rPr sz="1000" b="0">
+                <a:solidFill>
+                  <a:srgbClr val="B7B1A8"/>
+                </a:solidFill>
+                <a:latin typeface="PingFang SC"/>
+                <a:ea typeface="PingFang SC"/>
+              </a:rPr>
+              <a:t>核心定位</a:t>
+            </a:r>
+          </a:p>
+          <a:p>
+            <a:pPr algn="l">
+              <a:lnSpc>
+                <a:spcPct val="100000"/>
+              </a:lnSpc>
+              <a:spcBef>
+                <a:spcPts val="0"/>
+              </a:spcBef>
+              <a:spcAft>
+                <a:spcPts val="100"/>
+              </a:spcAft>
+            </a:pPr>
+            <a:r>
+              <a:rPr sz="1300" b="1">
+                <a:solidFill>
+                  <a:srgbClr val="FFFFFF"/>
+                </a:solidFill>
+                <a:latin typeface="PingFang SC"/>
+                <a:ea typeface="PingFang SC"/>
+              </a:rPr>
+              <a:t>Agentforce 360 基础模型</a:t>
+            </a:r>
+          </a:p>
+        </p:txBody>
+      </p:sp>
+      <p:sp>
+        <p:nvSpPr>
+          <p:cNvPr id="12" name="TextBox 11"/>
+          <p:cNvSpPr txBox="1"/>
+          <p:nvPr/>
+        </p:nvSpPr>
+        <p:spPr>
+          <a:xfrm>
+            <a:off x="722376" y="3707892"/>
+            <a:ext cx="2734056" cy="566928"/>
+          </a:xfrm>
+          <a:prstGeom prst="rect">
+            <a:avLst/>
+          </a:prstGeom>
+          <a:noFill/>
+        </p:spPr>
+        <p:txBody>
+          <a:bodyPr wrap="square" anchor="t" lIns="25400" rIns="25400" tIns="25400" bIns="25400">
+            <a:spAutoFit/>
+          </a:bodyPr>
+          <a:lstStyle/>
+          <a:p>
+            <a:pPr algn="l">
+              <a:lnSpc>
+                <a:spcPct val="100000"/>
+              </a:lnSpc>
+              <a:spcBef>
+                <a:spcPts val="0"/>
+              </a:spcBef>
+              <a:spcAft>
+                <a:spcPts val="100"/>
+              </a:spcAft>
+            </a:pPr>
+            <a:r>
+              <a:rPr sz="1000" b="0">
+                <a:solidFill>
+                  <a:srgbClr val="B7B1A8"/>
+                </a:solidFill>
+                <a:latin typeface="PingFang SC"/>
+                <a:ea typeface="PingFang SC"/>
+              </a:rPr>
+              <a:t>投资方</a:t>
+            </a:r>
+          </a:p>
+          <a:p>
+            <a:pPr algn="l">
+              <a:lnSpc>
+                <a:spcPct val="100000"/>
+              </a:lnSpc>
+              <a:spcBef>
+                <a:spcPts val="0"/>
+              </a:spcBef>
+              <a:spcAft>
+                <a:spcPts val="100"/>
+              </a:spcAft>
+            </a:pPr>
+            <a:r>
+              <a:rPr sz="1300" b="1">
+                <a:solidFill>
+                  <a:srgbClr val="FFFFFF"/>
+                </a:solidFill>
+                <a:latin typeface="PingFang SC"/>
+                <a:ea typeface="PingFang SC"/>
+              </a:rPr>
+              <a:t>Salesforce Ventures（C→G 轮）</a:t>
+            </a:r>
+          </a:p>
+        </p:txBody>
+      </p:sp>
+      <p:sp>
+        <p:nvSpPr>
+          <p:cNvPr id="13" name="TextBox 12"/>
+          <p:cNvSpPr txBox="1"/>
+          <p:nvPr/>
+        </p:nvSpPr>
+        <p:spPr>
+          <a:xfrm>
+            <a:off x="722376" y="4251960"/>
+            <a:ext cx="2734056" cy="566928"/>
+          </a:xfrm>
+          <a:prstGeom prst="rect">
+            <a:avLst/>
+          </a:prstGeom>
+          <a:noFill/>
+        </p:spPr>
+        <p:txBody>
+          <a:bodyPr wrap="square" anchor="t" lIns="25400" rIns="25400" tIns="25400" bIns="25400">
+            <a:spAutoFit/>
+          </a:bodyPr>
+          <a:lstStyle/>
+          <a:p>
+            <a:pPr algn="l">
+              <a:lnSpc>
+                <a:spcPct val="100000"/>
+              </a:lnSpc>
+              <a:spcBef>
+                <a:spcPts val="0"/>
+              </a:spcBef>
+              <a:spcAft>
+                <a:spcPts val="100"/>
+              </a:spcAft>
+            </a:pPr>
+            <a:r>
+              <a:rPr sz="1000" b="0">
+                <a:solidFill>
+                  <a:srgbClr val="B7B1A8"/>
+                </a:solidFill>
+                <a:latin typeface="PingFang SC"/>
+                <a:ea typeface="PingFang SC"/>
+              </a:rPr>
+              <a:t>目标行业</a:t>
+            </a:r>
+          </a:p>
+          <a:p>
+            <a:pPr algn="l">
+              <a:lnSpc>
+                <a:spcPct val="100000"/>
+              </a:lnSpc>
+              <a:spcBef>
+                <a:spcPts val="0"/>
+              </a:spcBef>
+              <a:spcAft>
+                <a:spcPts val="100"/>
+              </a:spcAft>
+            </a:pPr>
+            <a:r>
+              <a:rPr sz="1300" b="1">
+                <a:solidFill>
+                  <a:srgbClr val="FFFFFF"/>
+                </a:solidFill>
+                <a:latin typeface="PingFang SC"/>
+                <a:ea typeface="PingFang SC"/>
+              </a:rPr>
+              <a:t>金融/医疗/安全/生命科学</a:t>
+            </a:r>
+          </a:p>
+        </p:txBody>
+      </p:sp>
+      <p:sp>
+        <p:nvSpPr>
+          <p:cNvPr id="14" name="TextBox 13"/>
+          <p:cNvSpPr txBox="1"/>
+          <p:nvPr/>
+        </p:nvSpPr>
+        <p:spPr>
+          <a:xfrm>
+            <a:off x="722376" y="4796028"/>
+            <a:ext cx="2734056" cy="566928"/>
+          </a:xfrm>
+          <a:prstGeom prst="rect">
+            <a:avLst/>
+          </a:prstGeom>
+          <a:noFill/>
+        </p:spPr>
+        <p:txBody>
+          <a:bodyPr wrap="square" anchor="t" lIns="25400" rIns="25400" tIns="25400" bIns="25400">
+            <a:spAutoFit/>
+          </a:bodyPr>
+          <a:lstStyle/>
+          <a:p>
+            <a:pPr algn="l">
+              <a:lnSpc>
+                <a:spcPct val="100000"/>
+              </a:lnSpc>
+              <a:spcBef>
+                <a:spcPts val="0"/>
+              </a:spcBef>
+              <a:spcAft>
+                <a:spcPts val="100"/>
+              </a:spcAft>
+            </a:pPr>
+            <a:r>
+              <a:rPr sz="1000" b="0">
+                <a:solidFill>
+                  <a:srgbClr val="B7B1A8"/>
+                </a:solidFill>
+                <a:latin typeface="PingFang SC"/>
+                <a:ea typeface="PingFang SC"/>
+              </a:rPr>
+              <a:t>里程碑</a:t>
+            </a:r>
+          </a:p>
+          <a:p>
+            <a:pPr algn="l">
+              <a:lnSpc>
+                <a:spcPct val="100000"/>
+              </a:lnSpc>
+              <a:spcBef>
+                <a:spcPts val="0"/>
+              </a:spcBef>
+              <a:spcAft>
+                <a:spcPts val="100"/>
+              </a:spcAft>
+            </a:pPr>
+            <a:r>
+              <a:rPr sz="1300" b="1">
+                <a:solidFill>
+                  <a:srgbClr val="FFFFFF"/>
+                </a:solidFill>
+                <a:latin typeface="PingFang SC"/>
+                <a:ea typeface="PingFang SC"/>
+              </a:rPr>
+              <a:t>首个进入信任边界的 LLM</a:t>
+            </a:r>
+          </a:p>
+        </p:txBody>
+      </p:sp>
+      <p:sp>
+        <p:nvSpPr>
+          <p:cNvPr id="15" name="Rectangle 14"/>
+          <p:cNvSpPr/>
+          <p:nvPr/>
+        </p:nvSpPr>
+        <p:spPr>
+          <a:xfrm>
+            <a:off x="3840480" y="1325880"/>
+            <a:ext cx="7845552" cy="1874519"/>
+          </a:xfrm>
+          <a:prstGeom prst="rect">
+            <a:avLst/>
+          </a:prstGeom>
+          <a:solidFill>
+            <a:srgbClr val="FFFFFF"/>
+          </a:solidFill>
+          <a:ln w="12700">
+            <a:solidFill>
+              <a:srgbClr val="E3DDD3"/>
+            </a:solidFill>
+          </a:ln>
+          <a:effectLst/>
+        </p:spPr>
+        <p:style>
+          <a:lnRef idx="1">
+            <a:schemeClr val="accent1"/>
+          </a:lnRef>
+          <a:fillRef idx="3">
+            <a:schemeClr val="accent1"/>
+          </a:fillRef>
+          <a:effectRef idx="2">
+            <a:schemeClr val="accent1"/>
+          </a:effectRef>
+          <a:fontRef idx="minor">
+            <a:schemeClr val="lt1"/>
+          </a:fontRef>
+        </p:style>
+        <p:txBody>
+          <a:bodyPr rtlCol="0" anchor="ctr"/>
+          <a:lstStyle/>
+          <a:p>
+            <a:pPr algn="ctr"/>
+          </a:p>
+        </p:txBody>
+      </p:sp>
+      <p:sp>
+        <p:nvSpPr>
+          <p:cNvPr id="16" name="Rectangle 15"/>
+          <p:cNvSpPr/>
+          <p:nvPr/>
+        </p:nvSpPr>
+        <p:spPr>
+          <a:xfrm>
+            <a:off x="3840480" y="1325880"/>
+            <a:ext cx="91440" cy="1874519"/>
+          </a:xfrm>
+          <a:prstGeom prst="rect">
+            <a:avLst/>
+          </a:prstGeom>
+          <a:solidFill>
+            <a:srgbClr val="00A1E0"/>
+          </a:solidFill>
+          <a:ln>
+            <a:noFill/>
+          </a:ln>
+          <a:effectLst/>
+        </p:spPr>
+        <p:style>
+          <a:lnRef idx="1">
+            <a:schemeClr val="accent1"/>
+          </a:lnRef>
+          <a:fillRef idx="3">
+            <a:schemeClr val="accent1"/>
+          </a:fillRef>
+          <a:effectRef idx="2">
+            <a:schemeClr val="accent1"/>
+          </a:effectRef>
+          <a:fontRef idx="minor">
+            <a:schemeClr val="lt1"/>
+          </a:fontRef>
+        </p:style>
+        <p:txBody>
+          <a:bodyPr rtlCol="0" anchor="ctr"/>
+          <a:lstStyle/>
+          <a:p>
+            <a:pPr algn="ctr"/>
+          </a:p>
+        </p:txBody>
+      </p:sp>
+      <p:sp>
+        <p:nvSpPr>
+          <p:cNvPr id="17" name="TextBox 16"/>
+          <p:cNvSpPr txBox="1"/>
+          <p:nvPr/>
+        </p:nvSpPr>
+        <p:spPr>
+          <a:xfrm>
+            <a:off x="4078224" y="1435608"/>
+            <a:ext cx="7479792" cy="365760"/>
+          </a:xfrm>
+          <a:prstGeom prst="rect">
+            <a:avLst/>
+          </a:prstGeom>
+          <a:noFill/>
+        </p:spPr>
+        <p:txBody>
+          <a:bodyPr wrap="square" anchor="t" lIns="25400" rIns="25400" tIns="25400" bIns="25400">
+            <a:spAutoFit/>
+          </a:bodyPr>
+          <a:lstStyle/>
+          <a:p>
+            <a:pPr algn="l">
+              <a:spcBef>
+                <a:spcPts val="0"/>
+              </a:spcBef>
+              <a:spcAft>
+                <a:spcPts val="200"/>
+              </a:spcAft>
+            </a:pPr>
+            <a:r>
+              <a:rPr sz="1400" b="1">
+                <a:solidFill>
+                  <a:srgbClr val="00A1E0"/>
+                </a:solidFill>
+                <a:latin typeface="PingFang SC"/>
+                <a:ea typeface="PingFang SC"/>
+              </a:rPr>
+              <a:t>① 合作内容与技术整合</a:t>
+            </a:r>
+          </a:p>
+        </p:txBody>
+      </p:sp>
+      <p:sp>
+        <p:nvSpPr>
+          <p:cNvPr id="18" name="TextBox 17"/>
+          <p:cNvSpPr txBox="1"/>
+          <p:nvPr/>
+        </p:nvSpPr>
+        <p:spPr>
+          <a:xfrm>
+            <a:off x="4096512" y="1783080"/>
+            <a:ext cx="7388352" cy="2743200"/>
+          </a:xfrm>
+          <a:prstGeom prst="rect">
+            <a:avLst/>
+          </a:prstGeom>
+          <a:noFill/>
+        </p:spPr>
+        <p:txBody>
+          <a:bodyPr wrap="square" anchor="t" lIns="25400" rIns="25400" tIns="25400" bIns="25400">
+            <a:spAutoFit/>
+          </a:bodyPr>
+          <a:lstStyle/>
+          <a:p>
+            <a:pPr algn="l">
+              <a:lnSpc>
+                <a:spcPct val="108000"/>
+              </a:lnSpc>
+              <a:spcBef>
+                <a:spcPts val="0"/>
+              </a:spcBef>
+              <a:spcAft>
+                <a:spcPts val="800"/>
+              </a:spcAft>
+            </a:pPr>
+            <a:r>
+              <a:rPr sz="1150" b="1">
+                <a:solidFill>
+                  <a:srgbClr val="00A1E0"/>
+                </a:solidFill>
+                <a:latin typeface="PingFang SC"/>
+                <a:ea typeface="PingFang SC"/>
+              </a:rPr>
+              <a:t>▪ </a:t>
+            </a:r>
+            <a:r>
+              <a:rPr sz="1150" b="1">
+                <a:solidFill>
+                  <a:srgbClr val="1A1A1A"/>
+                </a:solidFill>
+                <a:latin typeface="PingFang SC"/>
+                <a:ea typeface="PingFang SC"/>
+              </a:rPr>
+              <a:t>成为 Agentforce 受监管行业「首选模型」</a:t>
+            </a:r>
+          </a:p>
+          <a:p>
+            <a:pPr algn="l">
+              <a:lnSpc>
+                <a:spcPct val="108000"/>
+              </a:lnSpc>
+              <a:spcBef>
+                <a:spcPts val="0"/>
+              </a:spcBef>
+              <a:spcAft>
+                <a:spcPts val="800"/>
+              </a:spcAft>
+            </a:pPr>
+            <a:r>
+              <a:rPr sz="1150" b="1">
+                <a:solidFill>
+                  <a:srgbClr val="00A1E0"/>
+                </a:solidFill>
+                <a:latin typeface="PingFang SC"/>
+                <a:ea typeface="PingFang SC"/>
+              </a:rPr>
+              <a:t>▪ </a:t>
+            </a:r>
+            <a:r>
+              <a:rPr sz="1150" b="1">
+                <a:solidFill>
+                  <a:srgbClr val="1A1A1A"/>
+                </a:solidFill>
+                <a:latin typeface="PingFang SC"/>
+                <a:ea typeface="PingFang SC"/>
+              </a:rPr>
+              <a:t>全部 Claude 流量限定在 Salesforce VPC / 信任边界内</a:t>
+            </a:r>
+          </a:p>
+          <a:p>
+            <a:pPr algn="l">
+              <a:lnSpc>
+                <a:spcPct val="108000"/>
+              </a:lnSpc>
+              <a:spcBef>
+                <a:spcPts val="0"/>
+              </a:spcBef>
+              <a:spcAft>
+                <a:spcPts val="800"/>
+              </a:spcAft>
+            </a:pPr>
+            <a:r>
+              <a:rPr sz="1150" b="1">
+                <a:solidFill>
+                  <a:srgbClr val="00A1E0"/>
+                </a:solidFill>
+                <a:latin typeface="PingFang SC"/>
+                <a:ea typeface="PingFang SC"/>
+              </a:rPr>
+              <a:t>▪ </a:t>
+            </a:r>
+            <a:r>
+              <a:rPr sz="1150" b="0">
+                <a:solidFill>
+                  <a:srgbClr val="5F5F5F"/>
+                </a:solidFill>
+                <a:latin typeface="PingFang SC"/>
+                <a:ea typeface="PingFang SC"/>
+              </a:rPr>
+              <a:t>Slack × MCP：Claude 直读 Slack/CRM 上下文并执行动作</a:t>
+            </a:r>
+          </a:p>
+          <a:p>
+            <a:pPr algn="l">
+              <a:lnSpc>
+                <a:spcPct val="108000"/>
+              </a:lnSpc>
+              <a:spcBef>
+                <a:spcPts val="0"/>
+              </a:spcBef>
+              <a:spcAft>
+                <a:spcPts val="800"/>
+              </a:spcAft>
+            </a:pPr>
+            <a:r>
+              <a:rPr sz="1150" b="1">
+                <a:solidFill>
+                  <a:srgbClr val="00A1E0"/>
+                </a:solidFill>
+                <a:latin typeface="PingFang SC"/>
+                <a:ea typeface="PingFang SC"/>
+              </a:rPr>
+              <a:t>▪ </a:t>
+            </a:r>
+            <a:r>
+              <a:rPr sz="1150" b="0">
+                <a:solidFill>
+                  <a:srgbClr val="5F5F5F"/>
+                </a:solidFill>
+                <a:latin typeface="PingFang SC"/>
+                <a:ea typeface="PingFang SC"/>
+              </a:rPr>
+              <a:t>Salesforce 全球工程团队部署 Claude Code（反向成为客户）</a:t>
+            </a:r>
+          </a:p>
+          <a:p>
+            <a:pPr algn="l">
+              <a:lnSpc>
+                <a:spcPct val="108000"/>
+              </a:lnSpc>
+              <a:spcBef>
+                <a:spcPts val="0"/>
+              </a:spcBef>
+              <a:spcAft>
+                <a:spcPts val="800"/>
+              </a:spcAft>
+            </a:pPr>
+            <a:r>
+              <a:rPr sz="1150" b="1">
+                <a:solidFill>
+                  <a:srgbClr val="00A1E0"/>
+                </a:solidFill>
+                <a:latin typeface="PingFang SC"/>
+                <a:ea typeface="PingFang SC"/>
+              </a:rPr>
+              <a:t>▪ </a:t>
+            </a:r>
+            <a:r>
+              <a:rPr sz="1150" b="0">
+                <a:solidFill>
+                  <a:srgbClr val="5F5F5F"/>
+                </a:solidFill>
+                <a:latin typeface="PingFang SC"/>
+                <a:ea typeface="PingFang SC"/>
+              </a:rPr>
+              <a:t>共建行业方案：先做金融（Claude for Financial Services）</a:t>
+            </a:r>
+          </a:p>
+        </p:txBody>
+      </p:sp>
+      <p:sp>
+        <p:nvSpPr>
+          <p:cNvPr id="19" name="Rectangle 18"/>
+          <p:cNvSpPr/>
+          <p:nvPr/>
+        </p:nvSpPr>
+        <p:spPr>
+          <a:xfrm>
+            <a:off x="3840480" y="3310128"/>
+            <a:ext cx="3840480" cy="2039112"/>
+          </a:xfrm>
+          <a:prstGeom prst="rect">
+            <a:avLst/>
+          </a:prstGeom>
+          <a:solidFill>
+            <a:srgbClr val="FFFFFF"/>
+          </a:solidFill>
+          <a:ln w="12700">
+            <a:solidFill>
+              <a:srgbClr val="E3DDD3"/>
+            </a:solidFill>
+          </a:ln>
+          <a:effectLst/>
+        </p:spPr>
+        <p:style>
+          <a:lnRef idx="1">
+            <a:schemeClr val="accent1"/>
+          </a:lnRef>
+          <a:fillRef idx="3">
+            <a:schemeClr val="accent1"/>
+          </a:fillRef>
+          <a:effectRef idx="2">
+            <a:schemeClr val="accent1"/>
+          </a:effectRef>
+          <a:fontRef idx="minor">
+            <a:schemeClr val="lt1"/>
+          </a:fontRef>
+        </p:style>
+        <p:txBody>
+          <a:bodyPr rtlCol="0" anchor="ctr"/>
+          <a:lstStyle/>
+          <a:p>
+            <a:pPr algn="ctr"/>
+          </a:p>
+        </p:txBody>
+      </p:sp>
+      <p:sp>
+        <p:nvSpPr>
+          <p:cNvPr id="20" name="Rectangle 19"/>
+          <p:cNvSpPr/>
+          <p:nvPr/>
+        </p:nvSpPr>
+        <p:spPr>
+          <a:xfrm>
+            <a:off x="3840480" y="3310128"/>
+            <a:ext cx="91440" cy="2039112"/>
+          </a:xfrm>
+          <a:prstGeom prst="rect">
+            <a:avLst/>
+          </a:prstGeom>
+          <a:solidFill>
+            <a:srgbClr val="00A1E0"/>
+          </a:solidFill>
+          <a:ln>
+            <a:noFill/>
+          </a:ln>
+          <a:effectLst/>
+        </p:spPr>
+        <p:style>
+          <a:lnRef idx="1">
+            <a:schemeClr val="accent1"/>
+          </a:lnRef>
+          <a:fillRef idx="3">
+            <a:schemeClr val="accent1"/>
+          </a:fillRef>
+          <a:effectRef idx="2">
+            <a:schemeClr val="accent1"/>
+          </a:effectRef>
+          <a:fontRef idx="minor">
+            <a:schemeClr val="lt1"/>
+          </a:fontRef>
+        </p:style>
+        <p:txBody>
+          <a:bodyPr rtlCol="0" anchor="ctr"/>
+          <a:lstStyle/>
+          <a:p>
+            <a:pPr algn="ctr"/>
+          </a:p>
+        </p:txBody>
+      </p:sp>
+      <p:sp>
+        <p:nvSpPr>
+          <p:cNvPr id="21" name="TextBox 20"/>
+          <p:cNvSpPr txBox="1"/>
+          <p:nvPr/>
+        </p:nvSpPr>
+        <p:spPr>
+          <a:xfrm>
+            <a:off x="4078224" y="3419856"/>
+            <a:ext cx="3474720" cy="365760"/>
+          </a:xfrm>
+          <a:prstGeom prst="rect">
+            <a:avLst/>
+          </a:prstGeom>
+          <a:noFill/>
+        </p:spPr>
+        <p:txBody>
+          <a:bodyPr wrap="square" anchor="t" lIns="25400" rIns="25400" tIns="25400" bIns="25400">
+            <a:spAutoFit/>
+          </a:bodyPr>
+          <a:lstStyle/>
+          <a:p>
+            <a:pPr algn="l">
+              <a:spcBef>
+                <a:spcPts val="0"/>
+              </a:spcBef>
+              <a:spcAft>
+                <a:spcPts val="200"/>
+              </a:spcAft>
+            </a:pPr>
+            <a:r>
+              <a:rPr sz="1400" b="1">
+                <a:solidFill>
+                  <a:srgbClr val="00A1E0"/>
+                </a:solidFill>
+                <a:latin typeface="PingFang SC"/>
+                <a:ea typeface="PingFang SC"/>
+              </a:rPr>
+              <a:t>② 战略价值</a:t>
+            </a:r>
+          </a:p>
+        </p:txBody>
+      </p:sp>
+      <p:sp>
+        <p:nvSpPr>
+          <p:cNvPr id="22" name="TextBox 21"/>
+          <p:cNvSpPr txBox="1"/>
+          <p:nvPr/>
+        </p:nvSpPr>
+        <p:spPr>
+          <a:xfrm>
+            <a:off x="4096512" y="3767328"/>
+            <a:ext cx="3383280" cy="2743200"/>
+          </a:xfrm>
+          <a:prstGeom prst="rect">
+            <a:avLst/>
+          </a:prstGeom>
+          <a:noFill/>
+        </p:spPr>
+        <p:txBody>
+          <a:bodyPr wrap="square" anchor="t" lIns="25400" rIns="25400" tIns="25400" bIns="25400">
+            <a:spAutoFit/>
+          </a:bodyPr>
+          <a:lstStyle/>
+          <a:p>
+            <a:pPr algn="l">
+              <a:lnSpc>
+                <a:spcPct val="108000"/>
+              </a:lnSpc>
+              <a:spcBef>
+                <a:spcPts val="0"/>
+              </a:spcBef>
+              <a:spcAft>
+                <a:spcPts val="800"/>
+              </a:spcAft>
+            </a:pPr>
+            <a:r>
+              <a:rPr sz="1100" b="1">
+                <a:solidFill>
+                  <a:srgbClr val="00A1E0"/>
+                </a:solidFill>
+                <a:latin typeface="PingFang SC"/>
+                <a:ea typeface="PingFang SC"/>
+              </a:rPr>
+              <a:t>▪ </a:t>
+            </a:r>
+            <a:r>
+              <a:rPr sz="1100" b="1">
+                <a:solidFill>
+                  <a:srgbClr val="1A1A1A"/>
+                </a:solidFill>
+                <a:latin typeface="PingFang SC"/>
+                <a:ea typeface="PingFang SC"/>
+              </a:rPr>
+              <a:t>「信任边界」内置 = 攻克受监管行业最大顾虑（安全/合规）</a:t>
+            </a:r>
+          </a:p>
+          <a:p>
+            <a:pPr algn="l">
+              <a:lnSpc>
+                <a:spcPct val="108000"/>
+              </a:lnSpc>
+              <a:spcBef>
+                <a:spcPts val="0"/>
+              </a:spcBef>
+              <a:spcAft>
+                <a:spcPts val="800"/>
+              </a:spcAft>
+            </a:pPr>
+            <a:r>
+              <a:rPr sz="1100" b="1">
+                <a:solidFill>
+                  <a:srgbClr val="00A1E0"/>
+                </a:solidFill>
+                <a:latin typeface="PingFang SC"/>
+                <a:ea typeface="PingFang SC"/>
+              </a:rPr>
+              <a:t>▪ </a:t>
+            </a:r>
+            <a:r>
+              <a:rPr sz="1100" b="0">
+                <a:solidFill>
+                  <a:srgbClr val="5F5F5F"/>
+                </a:solidFill>
+                <a:latin typeface="PingFang SC"/>
+                <a:ea typeface="PingFang SC"/>
+              </a:rPr>
+              <a:t>搭车高增长引擎：Agentforce ARR $800M（FY26Q4，YoY+169%）</a:t>
+            </a:r>
+          </a:p>
+          <a:p>
+            <a:pPr algn="l">
+              <a:lnSpc>
+                <a:spcPct val="108000"/>
+              </a:lnSpc>
+              <a:spcBef>
+                <a:spcPts val="0"/>
+              </a:spcBef>
+              <a:spcAft>
+                <a:spcPts val="800"/>
+              </a:spcAft>
+            </a:pPr>
+            <a:r>
+              <a:rPr sz="1100" b="1">
+                <a:solidFill>
+                  <a:srgbClr val="00A1E0"/>
+                </a:solidFill>
+                <a:latin typeface="PingFang SC"/>
+                <a:ea typeface="PingFang SC"/>
+              </a:rPr>
+              <a:t>▪ </a:t>
+            </a:r>
+            <a:r>
+              <a:rPr sz="1100" b="0">
+                <a:solidFill>
+                  <a:srgbClr val="5F5F5F"/>
+                </a:solidFill>
+                <a:latin typeface="PingFang SC"/>
+                <a:ea typeface="PingFang SC"/>
+              </a:rPr>
+              <a:t>双向绑定：既是供应商（进 Agentforce），又是客户（用 Claude Code）</a:t>
+            </a:r>
+          </a:p>
+          <a:p>
+            <a:pPr algn="l">
+              <a:lnSpc>
+                <a:spcPct val="108000"/>
+              </a:lnSpc>
+              <a:spcBef>
+                <a:spcPts val="0"/>
+              </a:spcBef>
+              <a:spcAft>
+                <a:spcPts val="800"/>
+              </a:spcAft>
+            </a:pPr>
+            <a:r>
+              <a:rPr sz="1100" b="1">
+                <a:solidFill>
+                  <a:srgbClr val="00A1E0"/>
+                </a:solidFill>
+                <a:latin typeface="PingFang SC"/>
+                <a:ea typeface="PingFang SC"/>
+              </a:rPr>
+              <a:t>▪ </a:t>
+            </a:r>
+            <a:r>
+              <a:rPr sz="1100" b="0">
+                <a:solidFill>
+                  <a:srgbClr val="5F5F5F"/>
+                </a:solidFill>
+                <a:latin typeface="PingFang SC"/>
+                <a:ea typeface="PingFang SC"/>
+              </a:rPr>
+              <a:t>受监管行业是「100× 应用层价值」最厚、门槛最高之处</a:t>
+            </a:r>
+          </a:p>
+        </p:txBody>
+      </p:sp>
+      <p:sp>
+        <p:nvSpPr>
+          <p:cNvPr id="23" name="Rectangle 22"/>
+          <p:cNvSpPr/>
+          <p:nvPr/>
+        </p:nvSpPr>
+        <p:spPr>
+          <a:xfrm>
+            <a:off x="7845552" y="3310128"/>
+            <a:ext cx="3840480" cy="2039112"/>
+          </a:xfrm>
+          <a:prstGeom prst="rect">
+            <a:avLst/>
+          </a:prstGeom>
+          <a:solidFill>
+            <a:srgbClr val="FFFFFF"/>
+          </a:solidFill>
+          <a:ln w="12700">
+            <a:solidFill>
+              <a:srgbClr val="E3DDD3"/>
+            </a:solidFill>
+          </a:ln>
+          <a:effectLst/>
+        </p:spPr>
+        <p:style>
+          <a:lnRef idx="1">
+            <a:schemeClr val="accent1"/>
+          </a:lnRef>
+          <a:fillRef idx="3">
+            <a:schemeClr val="accent1"/>
+          </a:fillRef>
+          <a:effectRef idx="2">
+            <a:schemeClr val="accent1"/>
+          </a:effectRef>
+          <a:fontRef idx="minor">
+            <a:schemeClr val="lt1"/>
+          </a:fontRef>
+        </p:style>
+        <p:txBody>
+          <a:bodyPr rtlCol="0" anchor="ctr"/>
+          <a:lstStyle/>
+          <a:p>
+            <a:pPr algn="ctr"/>
+          </a:p>
+        </p:txBody>
+      </p:sp>
+      <p:sp>
+        <p:nvSpPr>
+          <p:cNvPr id="24" name="Rectangle 23"/>
+          <p:cNvSpPr/>
+          <p:nvPr/>
+        </p:nvSpPr>
+        <p:spPr>
+          <a:xfrm>
+            <a:off x="7845552" y="3310128"/>
+            <a:ext cx="91440" cy="2039112"/>
+          </a:xfrm>
+          <a:prstGeom prst="rect">
+            <a:avLst/>
+          </a:prstGeom>
+          <a:solidFill>
+            <a:srgbClr val="00A1E0"/>
+          </a:solidFill>
+          <a:ln>
+            <a:noFill/>
+          </a:ln>
+          <a:effectLst/>
+        </p:spPr>
+        <p:style>
+          <a:lnRef idx="1">
+            <a:schemeClr val="accent1"/>
+          </a:lnRef>
+          <a:fillRef idx="3">
+            <a:schemeClr val="accent1"/>
+          </a:fillRef>
+          <a:effectRef idx="2">
+            <a:schemeClr val="accent1"/>
+          </a:effectRef>
+          <a:fontRef idx="minor">
+            <a:schemeClr val="lt1"/>
+          </a:fontRef>
+        </p:style>
+        <p:txBody>
+          <a:bodyPr rtlCol="0" anchor="ctr"/>
+          <a:lstStyle/>
+          <a:p>
+            <a:pPr algn="ctr"/>
+          </a:p>
+        </p:txBody>
+      </p:sp>
+      <p:sp>
+        <p:nvSpPr>
+          <p:cNvPr id="25" name="TextBox 24"/>
+          <p:cNvSpPr txBox="1"/>
+          <p:nvPr/>
+        </p:nvSpPr>
+        <p:spPr>
+          <a:xfrm>
+            <a:off x="8083296" y="3419856"/>
+            <a:ext cx="3474720" cy="365760"/>
+          </a:xfrm>
+          <a:prstGeom prst="rect">
+            <a:avLst/>
+          </a:prstGeom>
+          <a:noFill/>
+        </p:spPr>
+        <p:txBody>
+          <a:bodyPr wrap="square" anchor="t" lIns="25400" rIns="25400" tIns="25400" bIns="25400">
+            <a:spAutoFit/>
+          </a:bodyPr>
+          <a:lstStyle/>
+          <a:p>
+            <a:pPr algn="l">
+              <a:spcBef>
+                <a:spcPts val="0"/>
+              </a:spcBef>
+              <a:spcAft>
+                <a:spcPts val="200"/>
+              </a:spcAft>
+            </a:pPr>
+            <a:r>
+              <a:rPr sz="1400" b="1">
+                <a:solidFill>
+                  <a:srgbClr val="00A1E0"/>
+                </a:solidFill>
+                <a:latin typeface="PingFang SC"/>
+                <a:ea typeface="PingFang SC"/>
+              </a:rPr>
+              <a:t>③ 客户与案例</a:t>
+            </a:r>
+          </a:p>
+        </p:txBody>
+      </p:sp>
+      <p:sp>
+        <p:nvSpPr>
+          <p:cNvPr id="26" name="TextBox 25"/>
+          <p:cNvSpPr txBox="1"/>
+          <p:nvPr/>
+        </p:nvSpPr>
+        <p:spPr>
+          <a:xfrm>
+            <a:off x="8101584" y="3767328"/>
+            <a:ext cx="3383280" cy="2743200"/>
+          </a:xfrm>
+          <a:prstGeom prst="rect">
+            <a:avLst/>
+          </a:prstGeom>
+          <a:noFill/>
+        </p:spPr>
+        <p:txBody>
+          <a:bodyPr wrap="square" anchor="t" lIns="25400" rIns="25400" tIns="25400" bIns="25400">
+            <a:spAutoFit/>
+          </a:bodyPr>
+          <a:lstStyle/>
+          <a:p>
+            <a:pPr algn="l">
+              <a:lnSpc>
+                <a:spcPct val="108000"/>
+              </a:lnSpc>
+              <a:spcBef>
+                <a:spcPts val="0"/>
+              </a:spcBef>
+              <a:spcAft>
+                <a:spcPts val="800"/>
+              </a:spcAft>
+            </a:pPr>
+            <a:r>
+              <a:rPr sz="1100" b="1">
+                <a:solidFill>
+                  <a:srgbClr val="00A1E0"/>
+                </a:solidFill>
+                <a:latin typeface="PingFang SC"/>
+                <a:ea typeface="PingFang SC"/>
+              </a:rPr>
+              <a:t>▪ </a:t>
+            </a:r>
+            <a:r>
+              <a:rPr sz="1100" b="1">
+                <a:solidFill>
+                  <a:srgbClr val="1A1A1A"/>
+                </a:solidFill>
+                <a:latin typeface="PingFang SC"/>
+                <a:ea typeface="PingFang SC"/>
+              </a:rPr>
+              <a:t>CrowdStrike：在 Agentforce 中用 Claude 构建 AI 体验</a:t>
+            </a:r>
+          </a:p>
+          <a:p>
+            <a:pPr algn="l">
+              <a:lnSpc>
+                <a:spcPct val="108000"/>
+              </a:lnSpc>
+              <a:spcBef>
+                <a:spcPts val="0"/>
+              </a:spcBef>
+              <a:spcAft>
+                <a:spcPts val="800"/>
+              </a:spcAft>
+            </a:pPr>
+            <a:r>
+              <a:rPr sz="1100" b="1">
+                <a:solidFill>
+                  <a:srgbClr val="00A1E0"/>
+                </a:solidFill>
+                <a:latin typeface="PingFang SC"/>
+                <a:ea typeface="PingFang SC"/>
+              </a:rPr>
+              <a:t>▪ </a:t>
+            </a:r>
+            <a:r>
+              <a:rPr sz="1100" b="1">
+                <a:solidFill>
+                  <a:srgbClr val="1A1A1A"/>
+                </a:solidFill>
+                <a:latin typeface="PingFang SC"/>
+                <a:ea typeface="PingFang SC"/>
+              </a:rPr>
+              <a:t>RBC Wealth Management：财富管理场景落地</a:t>
+            </a:r>
+          </a:p>
+          <a:p>
+            <a:pPr algn="l">
+              <a:lnSpc>
+                <a:spcPct val="108000"/>
+              </a:lnSpc>
+              <a:spcBef>
+                <a:spcPts val="0"/>
+              </a:spcBef>
+              <a:spcAft>
+                <a:spcPts val="800"/>
+              </a:spcAft>
+            </a:pPr>
+            <a:r>
+              <a:rPr sz="1100" b="1">
+                <a:solidFill>
+                  <a:srgbClr val="00A1E0"/>
+                </a:solidFill>
+                <a:latin typeface="PingFang SC"/>
+                <a:ea typeface="PingFang SC"/>
+              </a:rPr>
+              <a:t>▪ </a:t>
+            </a:r>
+            <a:r>
+              <a:rPr sz="1100" b="0">
+                <a:solidFill>
+                  <a:srgbClr val="5F5F5F"/>
+                </a:solidFill>
+                <a:latin typeface="PingFang SC"/>
+                <a:ea typeface="PingFang SC"/>
+              </a:rPr>
+              <a:t>金融机构：理解金融工具、保险理赔与行业框架</a:t>
+            </a:r>
+          </a:p>
+          <a:p>
+            <a:pPr algn="l">
+              <a:lnSpc>
+                <a:spcPct val="108000"/>
+              </a:lnSpc>
+              <a:spcBef>
+                <a:spcPts val="0"/>
+              </a:spcBef>
+              <a:spcAft>
+                <a:spcPts val="800"/>
+              </a:spcAft>
+            </a:pPr>
+            <a:r>
+              <a:rPr sz="1100" b="1">
+                <a:solidFill>
+                  <a:srgbClr val="00A1E0"/>
+                </a:solidFill>
+                <a:latin typeface="PingFang SC"/>
+                <a:ea typeface="PingFang SC"/>
+              </a:rPr>
+              <a:t>▪ </a:t>
+            </a:r>
+            <a:r>
+              <a:rPr sz="1100" b="0">
+                <a:solidFill>
+                  <a:srgbClr val="5F5F5F"/>
+                </a:solidFill>
+                <a:latin typeface="PingFang SC"/>
+                <a:ea typeface="PingFang SC"/>
+              </a:rPr>
+              <a:t>经 Slack 触达海量企业协作场景</a:t>
+            </a:r>
+          </a:p>
+        </p:txBody>
+      </p:sp>
+      <p:sp>
+        <p:nvSpPr>
+          <p:cNvPr id="27" name="Rectangle 26"/>
+          <p:cNvSpPr/>
+          <p:nvPr/>
+        </p:nvSpPr>
+        <p:spPr>
+          <a:xfrm>
+            <a:off x="502920" y="5504688"/>
+            <a:ext cx="11183112" cy="896112"/>
+          </a:xfrm>
+          <a:prstGeom prst="rect">
+            <a:avLst/>
+          </a:prstGeom>
+          <a:solidFill>
+            <a:srgbClr val="2B2B2B"/>
+          </a:solidFill>
+          <a:ln>
+            <a:noFill/>
+          </a:ln>
+          <a:effectLst/>
+        </p:spPr>
+        <p:style>
+          <a:lnRef idx="1">
+            <a:schemeClr val="accent1"/>
+          </a:lnRef>
+          <a:fillRef idx="3">
+            <a:schemeClr val="accent1"/>
+          </a:fillRef>
+          <a:effectRef idx="2">
+            <a:schemeClr val="accent1"/>
+          </a:effectRef>
+          <a:fontRef idx="minor">
+            <a:schemeClr val="lt1"/>
+          </a:fontRef>
+        </p:style>
+        <p:txBody>
+          <a:bodyPr rtlCol="0" anchor="ctr"/>
+          <a:lstStyle/>
+          <a:p>
+            <a:pPr algn="ctr"/>
+          </a:p>
+        </p:txBody>
+      </p:sp>
+      <p:sp>
+        <p:nvSpPr>
+          <p:cNvPr id="28" name="Rectangle 27"/>
+          <p:cNvSpPr/>
+          <p:nvPr/>
+        </p:nvSpPr>
+        <p:spPr>
+          <a:xfrm>
+            <a:off x="502920" y="5504688"/>
+            <a:ext cx="109728" cy="896112"/>
+          </a:xfrm>
+          <a:prstGeom prst="rect">
+            <a:avLst/>
+          </a:prstGeom>
+          <a:solidFill>
+            <a:srgbClr val="00A1E0"/>
+          </a:solidFill>
+          <a:ln>
+            <a:noFill/>
+          </a:ln>
+          <a:effectLst/>
+        </p:spPr>
+        <p:style>
+          <a:lnRef idx="1">
+            <a:schemeClr val="accent1"/>
+          </a:lnRef>
+          <a:fillRef idx="3">
+            <a:schemeClr val="accent1"/>
+          </a:fillRef>
+          <a:effectRef idx="2">
+            <a:schemeClr val="accent1"/>
+          </a:effectRef>
+          <a:fontRef idx="minor">
+            <a:schemeClr val="lt1"/>
+          </a:fontRef>
+        </p:style>
+        <p:txBody>
+          <a:bodyPr rtlCol="0" anchor="ctr"/>
+          <a:lstStyle/>
+          <a:p>
+            <a:pPr algn="ctr"/>
+          </a:p>
+        </p:txBody>
+      </p:sp>
+      <p:sp>
+        <p:nvSpPr>
+          <p:cNvPr id="29" name="TextBox 28"/>
+          <p:cNvSpPr txBox="1"/>
+          <p:nvPr/>
+        </p:nvSpPr>
+        <p:spPr>
+          <a:xfrm>
+            <a:off x="804672" y="5614416"/>
+            <a:ext cx="10698480" cy="713232"/>
+          </a:xfrm>
+          <a:prstGeom prst="rect">
+            <a:avLst/>
+          </a:prstGeom>
+          <a:noFill/>
+        </p:spPr>
+        <p:txBody>
+          <a:bodyPr wrap="square" anchor="ctr" lIns="25400" rIns="25400" tIns="25400" bIns="25400">
+            <a:spAutoFit/>
+          </a:bodyPr>
+          <a:lstStyle/>
+          <a:p>
+            <a:pPr algn="l">
+              <a:lnSpc>
+                <a:spcPct val="108000"/>
+              </a:lnSpc>
+              <a:spcBef>
+                <a:spcPts val="0"/>
+              </a:spcBef>
+              <a:spcAft>
+                <a:spcPts val="200"/>
+              </a:spcAft>
+            </a:pPr>
+            <a:r>
+              <a:rPr sz="1250" b="1">
+                <a:solidFill>
+                  <a:srgbClr val="D97757"/>
+                </a:solidFill>
+                <a:latin typeface="PingFang SC"/>
+                <a:ea typeface="PingFang SC"/>
+              </a:rPr>
+              <a:t>战略本质：</a:t>
+            </a:r>
+            <a:r>
+              <a:rPr sz="1200" b="0">
+                <a:solidFill>
+                  <a:srgbClr val="FFFFFF"/>
+                </a:solidFill>
+                <a:latin typeface="PingFang SC"/>
+                <a:ea typeface="PingFang SC"/>
+              </a:rPr>
+              <a:t>受监管行业价值最厚但门槛是「信任」。Anthropic 用「进入对方信任边界」换取行业准入，把合规劣势转化为与 Salesforce 共建的壁垒。</a:t>
+            </a:r>
+          </a:p>
+        </p:txBody>
+      </p:sp>
+      <p:sp>
+        <p:nvSpPr>
+          <p:cNvPr id="30" name="TextBox 29"/>
+          <p:cNvSpPr txBox="1"/>
+          <p:nvPr/>
+        </p:nvSpPr>
+        <p:spPr>
+          <a:xfrm>
+            <a:off x="502920" y="6528816"/>
+            <a:ext cx="11155680" cy="274320"/>
+          </a:xfrm>
+          <a:prstGeom prst="rect">
+            <a:avLst/>
+          </a:prstGeom>
+          <a:noFill/>
+        </p:spPr>
+        <p:txBody>
+          <a:bodyPr wrap="square" anchor="t" lIns="25400" rIns="25400" tIns="25400" bIns="25400">
+            <a:spAutoFit/>
+          </a:bodyPr>
+          <a:lstStyle/>
+          <a:p>
+            <a:pPr algn="l">
+              <a:spcBef>
+                <a:spcPts val="0"/>
+              </a:spcBef>
+              <a:spcAft>
+                <a:spcPts val="200"/>
+              </a:spcAft>
+            </a:pPr>
+            <a:r>
+              <a:rPr sz="800" b="0">
+                <a:solidFill>
+                  <a:srgbClr val="5F5F5F"/>
+                </a:solidFill>
+                <a:latin typeface="PingFang SC"/>
+                <a:ea typeface="PingFang SC"/>
+              </a:rPr>
+              <a:t>资料来源：Anthropic / Salesforce 官方新闻稿与投资者公告、Salesforce Ben、ETIH（2025.10–2026）。</a:t>
             </a:r>
           </a:p>
         </p:txBody>
